--- a/submission/TalentLens-Deck.pptx
+++ b/submission/TalentLens-Deck.pptx
@@ -2,22 +2,22 @@
 <file path=ppt/presentation.xml><?xml version="1.0" encoding="utf-8"?>
 <p:presentation xmlns:p="http://schemas.openxmlformats.org/presentationml/2006/main">
   <p:sldMasterIdLst>
-    <p:sldMasterId xmlns:r="http://schemas.openxmlformats.org/officeDocument/2006/relationships" id="2147483648" r:id="Rc64e66f76c0f4d10"/>
+    <p:sldMasterId xmlns:r="http://schemas.openxmlformats.org/officeDocument/2006/relationships" id="2147483648" r:id="R9ca01544cd5b4967"/>
   </p:sldMasterIdLst>
   <p:notesMasterIdLst>
-    <p:notesMasterId xmlns:r="http://schemas.openxmlformats.org/officeDocument/2006/relationships" r:id="Rd145851d02234c25"/>
+    <p:notesMasterId xmlns:r="http://schemas.openxmlformats.org/officeDocument/2006/relationships" r:id="Re81621a971d84917"/>
   </p:notesMasterIdLst>
   <p:sldIdLst>
-    <p:sldId xmlns:r="http://schemas.openxmlformats.org/officeDocument/2006/relationships" id="256" r:id="R6e9f6520b6d64509"/>
-    <p:sldId xmlns:r="http://schemas.openxmlformats.org/officeDocument/2006/relationships" id="257" r:id="Rd8c961e627044062"/>
-    <p:sldId xmlns:r="http://schemas.openxmlformats.org/officeDocument/2006/relationships" id="258" r:id="R57b04dc77d1845c9"/>
-    <p:sldId xmlns:r="http://schemas.openxmlformats.org/officeDocument/2006/relationships" id="259" r:id="Rc394d7f3f7d7485f"/>
-    <p:sldId xmlns:r="http://schemas.openxmlformats.org/officeDocument/2006/relationships" id="260" r:id="Ra9a9da088f3946f4"/>
-    <p:sldId xmlns:r="http://schemas.openxmlformats.org/officeDocument/2006/relationships" id="261" r:id="Rf9bddfb515d84698"/>
-    <p:sldId xmlns:r="http://schemas.openxmlformats.org/officeDocument/2006/relationships" id="262" r:id="R0c1aba8fdc11454c"/>
-    <p:sldId xmlns:r="http://schemas.openxmlformats.org/officeDocument/2006/relationships" id="263" r:id="Rb18c366658db49bc"/>
-    <p:sldId xmlns:r="http://schemas.openxmlformats.org/officeDocument/2006/relationships" id="264" r:id="Ra37689059b8a404f"/>
-    <p:sldId xmlns:r="http://schemas.openxmlformats.org/officeDocument/2006/relationships" id="265" r:id="Rdb8fb9d195c442fd"/>
+    <p:sldId xmlns:r="http://schemas.openxmlformats.org/officeDocument/2006/relationships" id="256" r:id="R081480e004ec426c"/>
+    <p:sldId xmlns:r="http://schemas.openxmlformats.org/officeDocument/2006/relationships" id="257" r:id="R8cf8fc34cad04915"/>
+    <p:sldId xmlns:r="http://schemas.openxmlformats.org/officeDocument/2006/relationships" id="258" r:id="Raff3488e92e84ba7"/>
+    <p:sldId xmlns:r="http://schemas.openxmlformats.org/officeDocument/2006/relationships" id="259" r:id="Re9b415d5e7dc41d6"/>
+    <p:sldId xmlns:r="http://schemas.openxmlformats.org/officeDocument/2006/relationships" id="260" r:id="Ra8149bc28ea34ad7"/>
+    <p:sldId xmlns:r="http://schemas.openxmlformats.org/officeDocument/2006/relationships" id="261" r:id="R3a3b9328503341a3"/>
+    <p:sldId xmlns:r="http://schemas.openxmlformats.org/officeDocument/2006/relationships" id="262" r:id="R002b7acdeffc43b7"/>
+    <p:sldId xmlns:r="http://schemas.openxmlformats.org/officeDocument/2006/relationships" id="263" r:id="R98736b8a4d2c4519"/>
+    <p:sldId xmlns:r="http://schemas.openxmlformats.org/officeDocument/2006/relationships" id="264" r:id="R544df8d7beb74eea"/>
+    <p:sldId xmlns:r="http://schemas.openxmlformats.org/officeDocument/2006/relationships" id="265" r:id="Rc73846b66ab24cda"/>
   </p:sldIdLst>
   <p:sldSz cx="12192000" cy="6858000"/>
   <p:notesSz cx="6858000" cy="9144000"/>
@@ -731,7 +731,7 @@
           <a:lstStyle xmlns:a="http://schemas.openxmlformats.org/drawingml/2006/main"/>
           <a:p xmlns:a="http://schemas.openxmlformats.org/drawingml/2006/main">
             <a:r>
-              <a:t>Native editable architecture diagram. Nightshift routes all three Nemotron stages: extract, compare, critique. H-MEM supplies source-attributed prior context. Deterministic validation checks IDs, coverage and literal quotations; it does not assign candidate scores. One correction per stage, at most six model calls for a new role. Sources: server/analysis.js, server/index.js, server/hmem.js.</a:t>
+              <a:t>In Analyze from Zetaris, the app checks Nightshift readiness and then queries the authorized joined view before each analysis. Only the returned candidates enter inference. A failed or empty read stops the run, with no silent fallback to cached CVs. Workspace/local mode remains separately selectable. The trace records SQL, time, row count, client correlation IDs and document versions/hashes. Nightshift routes requirement extraction, comparison and critical review through Nemotron. H-MEM supplies attributed prior context. At most seven model calls for a new role: three initial calls, one extraction correction, one comparison correction and two review corrections. Sources: server/index.js, server/providers.js, tests/zetaris.test.js, README.md.</a:t>
             </a:r>
           </a:p>
         </p:txBody>
@@ -801,7 +801,7 @@
           <a:lstStyle xmlns:a="http://schemas.openxmlformats.org/drawingml/2006/main"/>
           <a:p xmlns:a="http://schemas.openxmlformats.org/drawingml/2006/main">
             <a:r>
-              <a:t>Sources: docs/SUBMISSION.md, examples/zetaris/verified-review-workflow.json. Model: nvidia/nemotron-3.5-lightning-30b-a3b. Official H-MEM conformance: 13/13 checks at pinned revision 1742dec56a66e58eef9dda2d2b865823758ca8cd. Cursor is optional and no Cursor-built award is claimed.</a:t>
+              <a:t>Sources: docs/SUBMISSION.md, examples/zetaris/verified-review-workflow.json. Model: nvidia/nemotron-3.5-lightning-30b-a3b. Official H-MEM conformance: 13/13 checks at pinned revision 1742dec56a66e58eef9dda2d2b865823758ca8cd. Cursor is optional and no Cursor-built award is claimed. The 27 October reinforcement queries before each Zetaris analysis and records provenance in the report and Markdown export. Query/request IDs are generated by TalentLens and sent to Zetaris for correlation, not independently signed receipts. Tests cover empty/failed reads, source replacement, deletion during query and local-mode independence. The 26 October recording predates this enhancement and is retained as historical evidence. Sources: docs/ZETARIS-WORKFLOW.md, tests/zetaris.test.js.</a:t>
             </a:r>
           </a:p>
         </p:txBody>
@@ -1011,7 +1011,7 @@
           <a:lstStyle xmlns:a="http://schemas.openxmlformats.org/drawingml/2006/main"/>
           <a:p xmlns:a="http://schemas.openxmlformats.org/drawingml/2006/main">
             <a:r>
-              <a:t>Real Nemotron evaluation, 26 October 2026: evaluation/results.json. 16 maintainer-authored fictional profiles, 32 criterion/candidate cells, all matching authored expectations; 0 unsupported positive assessments in this set. Four atomic requirement groups; one CV instruction attack. The second critical review changed 0 cells in this run, so no quality gain from it is claimed. Tests: 36/36 (mocked external transport); H-MEM official checks: 13/13. This is not independent recruiter validation or a general accuracy estimate.</a:t>
+              <a:t>Real Nemotron evaluation, 26 October 2026: evaluation/results.json. 16 maintainer-authored fictional profiles, 32 criterion/candidate cells, all matching authored expectations; 0 unsupported positive assessments in this set. Four atomic requirement groups; one CV instruction attack. The second critical review changed 0 cells in this run, so no quality gain from it is claimed. Tests on 27 October: 50/50 (mocked external transport); H-MEM official checks: 13/13. This is not independent recruiter validation or a general accuracy estimate. The six additional Zetaris tests use mocked external services. Do not present mocks as real sponsor executions.</a:t>
             </a:r>
           </a:p>
         </p:txBody>
@@ -3524,12 +3524,12 @@
   </p:cSld>
   <p:clrMap bg1="lt1" tx1="dk1" bg2="lt2" tx2="dk2" accent1="accent1" accent2="accent2" accent3="accent3" accent4="accent4" accent5="accent5" accent6="accent6" hlink="hlink" folHlink="folHlink"/>
   <p:sldLayoutIdLst>
-    <p:sldLayoutId xmlns:r="http://schemas.openxmlformats.org/officeDocument/2006/relationships" id="2147483649" r:id="Rdff3bb448cf146b2"/>
-    <p:sldLayoutId xmlns:r="http://schemas.openxmlformats.org/officeDocument/2006/relationships" id="2147483650" r:id="Rcabc8a9506124cc1"/>
-    <p:sldLayoutId xmlns:r="http://schemas.openxmlformats.org/officeDocument/2006/relationships" id="2147483651" r:id="R41daec1295bc4d20"/>
-    <p:sldLayoutId xmlns:r="http://schemas.openxmlformats.org/officeDocument/2006/relationships" id="2147483652" r:id="R8e0e0383973f4c48"/>
-    <p:sldLayoutId xmlns:r="http://schemas.openxmlformats.org/officeDocument/2006/relationships" id="2147483653" r:id="Ra247bd03255346fc"/>
-    <p:sldLayoutId xmlns:r="http://schemas.openxmlformats.org/officeDocument/2006/relationships" id="2147483654" r:id="R21917d71b23a46cf"/>
+    <p:sldLayoutId xmlns:r="http://schemas.openxmlformats.org/officeDocument/2006/relationships" id="2147483649" r:id="Re94a072cf4104e95"/>
+    <p:sldLayoutId xmlns:r="http://schemas.openxmlformats.org/officeDocument/2006/relationships" id="2147483650" r:id="R09f35050d34a4fcc"/>
+    <p:sldLayoutId xmlns:r="http://schemas.openxmlformats.org/officeDocument/2006/relationships" id="2147483651" r:id="R6f9507c624a8470f"/>
+    <p:sldLayoutId xmlns:r="http://schemas.openxmlformats.org/officeDocument/2006/relationships" id="2147483652" r:id="R2851993d0f764e7a"/>
+    <p:sldLayoutId xmlns:r="http://schemas.openxmlformats.org/officeDocument/2006/relationships" id="2147483653" r:id="Rd42367ca8e4d4fb5"/>
+    <p:sldLayoutId xmlns:r="http://schemas.openxmlformats.org/officeDocument/2006/relationships" id="2147483654" r:id="R46f04ddeb152405a"/>
   </p:sldLayoutIdLst>
   <p:txStyles>
     <p:titleStyle>
@@ -4080,7 +4080,7 @@
           <p:cNvPr id="7" name="">
             <a:extLst xmlns:a="http://schemas.openxmlformats.org/drawingml/2006/main">
               <a:ext uri="{FF2B5EF4-FFF2-40B4-BE49-F238E27FC236}">
-                <a16:creationId xmlns:a16="http://schemas.microsoft.com/office/drawing/2014/main" id="{5C656790-E5AD-4AD6-8BA6-F721417557F2}"/>
+                <a16:creationId xmlns:a16="http://schemas.microsoft.com/office/drawing/2014/main" id="{3AC2577B-C5CD-4F9E-883D-C77781C86430}"/>
               </a:ext>
             </a:extLst>
           </p:cNvPr>
@@ -4090,10 +4090,10 @@
           <p:nvPr/>
         </p:nvPicPr>
         <p:blipFill>
-          <a:blip xmlns:r="http://schemas.openxmlformats.org/officeDocument/2006/relationships" xmlns:a="http://schemas.openxmlformats.org/drawingml/2006/main" r:embed="R8ea175b6bbe8499d">
+          <a:blip xmlns:r="http://schemas.openxmlformats.org/officeDocument/2006/relationships" xmlns:a="http://schemas.openxmlformats.org/drawingml/2006/main" r:embed="R043c5350be534083">
             <a:extLst>
               <a:ext uri="{96DAC541-7B7A-43D3-8B79-37D633B846F1}">
-                <asvg:svgBlip xmlns:asvg="http://schemas.microsoft.com/office/drawing/2016/SVG/main" r:embed="R1d54c25cbbac46d5"/>
+                <asvg:svgBlip xmlns:asvg="http://schemas.microsoft.com/office/drawing/2016/SVG/main" r:embed="R94bcab64d6fe4810"/>
               </a:ext>
             </a:extLst>
           </a:blip>
@@ -5401,6 +5401,7 @@
               </a:defRPr>
             </a:defPPr>
             <a:lvl1pPr>
+              <a:buNone/>
               <a:defRPr sz="3225" b="1">
                 <a:solidFill>
                   <a:srgbClr val="684A3A"/>
@@ -5411,6 +5412,7 @@
               </a:defRPr>
             </a:lvl1pPr>
             <a:lvl2pPr>
+              <a:buNone/>
               <a:defRPr sz="3225" b="1">
                 <a:solidFill>
                   <a:srgbClr val="684A3A"/>
@@ -5421,6 +5423,7 @@
               </a:defRPr>
             </a:lvl2pPr>
             <a:lvl3pPr>
+              <a:buNone/>
               <a:defRPr sz="3225" b="1">
                 <a:solidFill>
                   <a:srgbClr val="684A3A"/>
@@ -5431,6 +5434,7 @@
               </a:defRPr>
             </a:lvl3pPr>
             <a:lvl4pPr>
+              <a:buNone/>
               <a:defRPr sz="3225" b="1">
                 <a:solidFill>
                   <a:srgbClr val="684A3A"/>
@@ -5441,6 +5445,7 @@
               </a:defRPr>
             </a:lvl4pPr>
             <a:lvl5pPr>
+              <a:buNone/>
               <a:defRPr sz="3225" b="1">
                 <a:solidFill>
                   <a:srgbClr val="684A3A"/>
@@ -5451,6 +5456,7 @@
               </a:defRPr>
             </a:lvl5pPr>
             <a:lvl6pPr>
+              <a:buNone/>
               <a:defRPr sz="3225" b="1">
                 <a:solidFill>
                   <a:srgbClr val="684A3A"/>
@@ -5461,6 +5467,7 @@
               </a:defRPr>
             </a:lvl6pPr>
             <a:lvl7pPr>
+              <a:buNone/>
               <a:defRPr sz="3225" b="1">
                 <a:solidFill>
                   <a:srgbClr val="684A3A"/>
@@ -5471,6 +5478,7 @@
               </a:defRPr>
             </a:lvl7pPr>
             <a:lvl8pPr>
+              <a:buNone/>
               <a:defRPr sz="3225" b="1">
                 <a:solidFill>
                   <a:srgbClr val="684A3A"/>
@@ -5481,6 +5489,7 @@
               </a:defRPr>
             </a:lvl8pPr>
             <a:lvl9pPr>
+              <a:buNone/>
               <a:defRPr sz="3225" b="1">
                 <a:solidFill>
                   <a:srgbClr val="684A3A"/>
@@ -5493,6 +5502,7 @@
           </a:lstStyle>
           <a:p xmlns:a="http://schemas.openxmlformats.org/drawingml/2006/main">
             <a:pPr>
+              <a:buNone/>
               <a:defRPr sz="3225" b="1">
                 <a:solidFill>
                   <a:srgbClr val="684A3A"/>
@@ -5516,6 +5526,7 @@
           </a:p>
           <a:p xmlns:a="http://schemas.openxmlformats.org/drawingml/2006/main">
             <a:pPr>
+              <a:buNone/>
               <a:defRPr sz="3225" b="1">
                 <a:solidFill>
                   <a:srgbClr val="684A3A"/>
@@ -5610,6 +5621,7 @@
               </a:defRPr>
             </a:defPPr>
             <a:lvl1pPr>
+              <a:buNone/>
               <a:defRPr sz="2850" b="1">
                 <a:solidFill>
                   <a:srgbClr val="473229"/>
@@ -5620,6 +5632,7 @@
               </a:defRPr>
             </a:lvl1pPr>
             <a:lvl2pPr>
+              <a:buNone/>
               <a:defRPr sz="2850" b="1">
                 <a:solidFill>
                   <a:srgbClr val="473229"/>
@@ -5630,6 +5643,7 @@
               </a:defRPr>
             </a:lvl2pPr>
             <a:lvl3pPr>
+              <a:buNone/>
               <a:defRPr sz="2850" b="1">
                 <a:solidFill>
                   <a:srgbClr val="473229"/>
@@ -5640,6 +5654,7 @@
               </a:defRPr>
             </a:lvl3pPr>
             <a:lvl4pPr>
+              <a:buNone/>
               <a:defRPr sz="2850" b="1">
                 <a:solidFill>
                   <a:srgbClr val="473229"/>
@@ -5650,6 +5665,7 @@
               </a:defRPr>
             </a:lvl4pPr>
             <a:lvl5pPr>
+              <a:buNone/>
               <a:defRPr sz="2850" b="1">
                 <a:solidFill>
                   <a:srgbClr val="473229"/>
@@ -5660,6 +5676,7 @@
               </a:defRPr>
             </a:lvl5pPr>
             <a:lvl6pPr>
+              <a:buNone/>
               <a:defRPr sz="2850" b="1">
                 <a:solidFill>
                   <a:srgbClr val="473229"/>
@@ -5670,6 +5687,7 @@
               </a:defRPr>
             </a:lvl6pPr>
             <a:lvl7pPr>
+              <a:buNone/>
               <a:defRPr sz="2850" b="1">
                 <a:solidFill>
                   <a:srgbClr val="473229"/>
@@ -5680,6 +5698,7 @@
               </a:defRPr>
             </a:lvl7pPr>
             <a:lvl8pPr>
+              <a:buNone/>
               <a:defRPr sz="2850" b="1">
                 <a:solidFill>
                   <a:srgbClr val="473229"/>
@@ -5690,6 +5709,7 @@
               </a:defRPr>
             </a:lvl8pPr>
             <a:lvl9pPr>
+              <a:buNone/>
               <a:defRPr sz="2850" b="1">
                 <a:solidFill>
                   <a:srgbClr val="473229"/>
@@ -5702,6 +5722,7 @@
           </a:lstStyle>
           <a:p xmlns:a="http://schemas.openxmlformats.org/drawingml/2006/main">
             <a:pPr>
+              <a:buNone/>
               <a:defRPr sz="2850" b="1">
                 <a:solidFill>
                   <a:srgbClr val="473229"/>
@@ -5766,6 +5787,7 @@
               </a:defRPr>
             </a:defPPr>
             <a:lvl1pPr>
+              <a:buNone/>
               <a:defRPr sz="1950" b="0">
                 <a:solidFill>
                   <a:srgbClr val="473229"/>
@@ -5776,6 +5798,7 @@
               </a:defRPr>
             </a:lvl1pPr>
             <a:lvl2pPr>
+              <a:buNone/>
               <a:defRPr sz="1950" b="0">
                 <a:solidFill>
                   <a:srgbClr val="473229"/>
@@ -5786,6 +5809,7 @@
               </a:defRPr>
             </a:lvl2pPr>
             <a:lvl3pPr>
+              <a:buNone/>
               <a:defRPr sz="1950" b="0">
                 <a:solidFill>
                   <a:srgbClr val="473229"/>
@@ -5796,6 +5820,7 @@
               </a:defRPr>
             </a:lvl3pPr>
             <a:lvl4pPr>
+              <a:buNone/>
               <a:defRPr sz="1950" b="0">
                 <a:solidFill>
                   <a:srgbClr val="473229"/>
@@ -5806,6 +5831,7 @@
               </a:defRPr>
             </a:lvl4pPr>
             <a:lvl5pPr>
+              <a:buNone/>
               <a:defRPr sz="1950" b="0">
                 <a:solidFill>
                   <a:srgbClr val="473229"/>
@@ -5816,6 +5842,7 @@
               </a:defRPr>
             </a:lvl5pPr>
             <a:lvl6pPr>
+              <a:buNone/>
               <a:defRPr sz="1950" b="0">
                 <a:solidFill>
                   <a:srgbClr val="473229"/>
@@ -5826,6 +5853,7 @@
               </a:defRPr>
             </a:lvl6pPr>
             <a:lvl7pPr>
+              <a:buNone/>
               <a:defRPr sz="1950" b="0">
                 <a:solidFill>
                   <a:srgbClr val="473229"/>
@@ -5836,6 +5864,7 @@
               </a:defRPr>
             </a:lvl7pPr>
             <a:lvl8pPr>
+              <a:buNone/>
               <a:defRPr sz="1950" b="0">
                 <a:solidFill>
                   <a:srgbClr val="473229"/>
@@ -5846,6 +5875,7 @@
               </a:defRPr>
             </a:lvl8pPr>
             <a:lvl9pPr>
+              <a:buNone/>
               <a:defRPr sz="1950" b="0">
                 <a:solidFill>
                   <a:srgbClr val="473229"/>
@@ -5858,6 +5888,7 @@
           </a:lstStyle>
           <a:p xmlns:a="http://schemas.openxmlformats.org/drawingml/2006/main">
             <a:pPr>
+              <a:buNone/>
               <a:defRPr sz="1950" b="0">
                 <a:solidFill>
                   <a:srgbClr val="473229"/>
@@ -5922,6 +5953,7 @@
               </a:defRPr>
             </a:defPPr>
             <a:lvl1pPr>
+              <a:buNone/>
               <a:defRPr sz="2175" b="0">
                 <a:solidFill>
                   <a:srgbClr val="806E60"/>
@@ -5932,6 +5964,7 @@
               </a:defRPr>
             </a:lvl1pPr>
             <a:lvl2pPr>
+              <a:buNone/>
               <a:defRPr sz="2175" b="0">
                 <a:solidFill>
                   <a:srgbClr val="806E60"/>
@@ -5942,6 +5975,7 @@
               </a:defRPr>
             </a:lvl2pPr>
             <a:lvl3pPr>
+              <a:buNone/>
               <a:defRPr sz="2175" b="0">
                 <a:solidFill>
                   <a:srgbClr val="806E60"/>
@@ -5952,6 +5986,7 @@
               </a:defRPr>
             </a:lvl3pPr>
             <a:lvl4pPr>
+              <a:buNone/>
               <a:defRPr sz="2175" b="0">
                 <a:solidFill>
                   <a:srgbClr val="806E60"/>
@@ -5962,6 +5997,7 @@
               </a:defRPr>
             </a:lvl4pPr>
             <a:lvl5pPr>
+              <a:buNone/>
               <a:defRPr sz="2175" b="0">
                 <a:solidFill>
                   <a:srgbClr val="806E60"/>
@@ -5972,6 +6008,7 @@
               </a:defRPr>
             </a:lvl5pPr>
             <a:lvl6pPr>
+              <a:buNone/>
               <a:defRPr sz="2175" b="0">
                 <a:solidFill>
                   <a:srgbClr val="806E60"/>
@@ -5982,6 +6019,7 @@
               </a:defRPr>
             </a:lvl6pPr>
             <a:lvl7pPr>
+              <a:buNone/>
               <a:defRPr sz="2175" b="0">
                 <a:solidFill>
                   <a:srgbClr val="806E60"/>
@@ -5992,6 +6030,7 @@
               </a:defRPr>
             </a:lvl7pPr>
             <a:lvl8pPr>
+              <a:buNone/>
               <a:defRPr sz="2175" b="0">
                 <a:solidFill>
                   <a:srgbClr val="806E60"/>
@@ -6002,6 +6041,7 @@
               </a:defRPr>
             </a:lvl8pPr>
             <a:lvl9pPr>
+              <a:buNone/>
               <a:defRPr sz="2175" b="0">
                 <a:solidFill>
                   <a:srgbClr val="806E60"/>
@@ -6014,6 +6054,7 @@
           </a:lstStyle>
           <a:p xmlns:a="http://schemas.openxmlformats.org/drawingml/2006/main">
             <a:pPr>
+              <a:buNone/>
               <a:defRPr sz="2175" b="0">
                 <a:solidFill>
                   <a:srgbClr val="806E60"/>
@@ -6635,6 +6676,7 @@
               </a:defRPr>
             </a:defPPr>
             <a:lvl1pPr>
+              <a:buNone/>
               <a:defRPr sz="4050" b="1">
                 <a:solidFill>
                   <a:srgbClr val="C5A274"/>
@@ -6645,6 +6687,7 @@
               </a:defRPr>
             </a:lvl1pPr>
             <a:lvl2pPr>
+              <a:buNone/>
               <a:defRPr sz="4050" b="1">
                 <a:solidFill>
                   <a:srgbClr val="C5A274"/>
@@ -6655,6 +6698,7 @@
               </a:defRPr>
             </a:lvl2pPr>
             <a:lvl3pPr>
+              <a:buNone/>
               <a:defRPr sz="4050" b="1">
                 <a:solidFill>
                   <a:srgbClr val="C5A274"/>
@@ -6665,6 +6709,7 @@
               </a:defRPr>
             </a:lvl3pPr>
             <a:lvl4pPr>
+              <a:buNone/>
               <a:defRPr sz="4050" b="1">
                 <a:solidFill>
                   <a:srgbClr val="C5A274"/>
@@ -6675,6 +6720,7 @@
               </a:defRPr>
             </a:lvl4pPr>
             <a:lvl5pPr>
+              <a:buNone/>
               <a:defRPr sz="4050" b="1">
                 <a:solidFill>
                   <a:srgbClr val="C5A274"/>
@@ -6685,6 +6731,7 @@
               </a:defRPr>
             </a:lvl5pPr>
             <a:lvl6pPr>
+              <a:buNone/>
               <a:defRPr sz="4050" b="1">
                 <a:solidFill>
                   <a:srgbClr val="C5A274"/>
@@ -6695,6 +6742,7 @@
               </a:defRPr>
             </a:lvl6pPr>
             <a:lvl7pPr>
+              <a:buNone/>
               <a:defRPr sz="4050" b="1">
                 <a:solidFill>
                   <a:srgbClr val="C5A274"/>
@@ -6705,6 +6753,7 @@
               </a:defRPr>
             </a:lvl7pPr>
             <a:lvl8pPr>
+              <a:buNone/>
               <a:defRPr sz="4050" b="1">
                 <a:solidFill>
                   <a:srgbClr val="C5A274"/>
@@ -6715,6 +6764,7 @@
               </a:defRPr>
             </a:lvl8pPr>
             <a:lvl9pPr>
+              <a:buNone/>
               <a:defRPr sz="4050" b="1">
                 <a:solidFill>
                   <a:srgbClr val="C5A274"/>
@@ -6727,6 +6777,7 @@
           </a:lstStyle>
           <a:p xmlns:a="http://schemas.openxmlformats.org/drawingml/2006/main">
             <a:pPr>
+              <a:buNone/>
               <a:defRPr sz="4050" b="1">
                 <a:solidFill>
                   <a:srgbClr val="C5A274"/>
@@ -6791,6 +6842,7 @@
               </a:defRPr>
             </a:defPPr>
             <a:lvl1pPr>
+              <a:buNone/>
               <a:defRPr sz="2325" b="1">
                 <a:solidFill>
                   <a:srgbClr val="684A3A"/>
@@ -6801,6 +6853,7 @@
               </a:defRPr>
             </a:lvl1pPr>
             <a:lvl2pPr>
+              <a:buNone/>
               <a:defRPr sz="2325" b="1">
                 <a:solidFill>
                   <a:srgbClr val="684A3A"/>
@@ -6811,6 +6864,7 @@
               </a:defRPr>
             </a:lvl2pPr>
             <a:lvl3pPr>
+              <a:buNone/>
               <a:defRPr sz="2325" b="1">
                 <a:solidFill>
                   <a:srgbClr val="684A3A"/>
@@ -6821,6 +6875,7 @@
               </a:defRPr>
             </a:lvl3pPr>
             <a:lvl4pPr>
+              <a:buNone/>
               <a:defRPr sz="2325" b="1">
                 <a:solidFill>
                   <a:srgbClr val="684A3A"/>
@@ -6831,6 +6886,7 @@
               </a:defRPr>
             </a:lvl4pPr>
             <a:lvl5pPr>
+              <a:buNone/>
               <a:defRPr sz="2325" b="1">
                 <a:solidFill>
                   <a:srgbClr val="684A3A"/>
@@ -6841,6 +6897,7 @@
               </a:defRPr>
             </a:lvl5pPr>
             <a:lvl6pPr>
+              <a:buNone/>
               <a:defRPr sz="2325" b="1">
                 <a:solidFill>
                   <a:srgbClr val="684A3A"/>
@@ -6851,6 +6908,7 @@
               </a:defRPr>
             </a:lvl6pPr>
             <a:lvl7pPr>
+              <a:buNone/>
               <a:defRPr sz="2325" b="1">
                 <a:solidFill>
                   <a:srgbClr val="684A3A"/>
@@ -6861,6 +6919,7 @@
               </a:defRPr>
             </a:lvl7pPr>
             <a:lvl8pPr>
+              <a:buNone/>
               <a:defRPr sz="2325" b="1">
                 <a:solidFill>
                   <a:srgbClr val="684A3A"/>
@@ -6871,6 +6930,7 @@
               </a:defRPr>
             </a:lvl8pPr>
             <a:lvl9pPr>
+              <a:buNone/>
               <a:defRPr sz="2325" b="1">
                 <a:solidFill>
                   <a:srgbClr val="684A3A"/>
@@ -6883,6 +6943,7 @@
           </a:lstStyle>
           <a:p xmlns:a="http://schemas.openxmlformats.org/drawingml/2006/main">
             <a:pPr>
+              <a:buNone/>
               <a:defRPr sz="2325" b="1">
                 <a:solidFill>
                   <a:srgbClr val="684A3A"/>
@@ -6947,6 +7008,7 @@
               </a:defRPr>
             </a:defPPr>
             <a:lvl1pPr>
+              <a:buNone/>
               <a:defRPr sz="2025" b="0">
                 <a:solidFill>
                   <a:srgbClr val="473229"/>
@@ -6957,6 +7019,7 @@
               </a:defRPr>
             </a:lvl1pPr>
             <a:lvl2pPr>
+              <a:buNone/>
               <a:defRPr sz="2025" b="0">
                 <a:solidFill>
                   <a:srgbClr val="473229"/>
@@ -6967,6 +7030,7 @@
               </a:defRPr>
             </a:lvl2pPr>
             <a:lvl3pPr>
+              <a:buNone/>
               <a:defRPr sz="2025" b="0">
                 <a:solidFill>
                   <a:srgbClr val="473229"/>
@@ -6977,6 +7041,7 @@
               </a:defRPr>
             </a:lvl3pPr>
             <a:lvl4pPr>
+              <a:buNone/>
               <a:defRPr sz="2025" b="0">
                 <a:solidFill>
                   <a:srgbClr val="473229"/>
@@ -6987,6 +7052,7 @@
               </a:defRPr>
             </a:lvl4pPr>
             <a:lvl5pPr>
+              <a:buNone/>
               <a:defRPr sz="2025" b="0">
                 <a:solidFill>
                   <a:srgbClr val="473229"/>
@@ -6997,6 +7063,7 @@
               </a:defRPr>
             </a:lvl5pPr>
             <a:lvl6pPr>
+              <a:buNone/>
               <a:defRPr sz="2025" b="0">
                 <a:solidFill>
                   <a:srgbClr val="473229"/>
@@ -7007,6 +7074,7 @@
               </a:defRPr>
             </a:lvl6pPr>
             <a:lvl7pPr>
+              <a:buNone/>
               <a:defRPr sz="2025" b="0">
                 <a:solidFill>
                   <a:srgbClr val="473229"/>
@@ -7017,6 +7085,7 @@
               </a:defRPr>
             </a:lvl7pPr>
             <a:lvl8pPr>
+              <a:buNone/>
               <a:defRPr sz="2025" b="0">
                 <a:solidFill>
                   <a:srgbClr val="473229"/>
@@ -7027,6 +7096,7 @@
               </a:defRPr>
             </a:lvl8pPr>
             <a:lvl9pPr>
+              <a:buNone/>
               <a:defRPr sz="2025" b="0">
                 <a:solidFill>
                   <a:srgbClr val="473229"/>
@@ -7039,6 +7109,7 @@
           </a:lstStyle>
           <a:p xmlns:a="http://schemas.openxmlformats.org/drawingml/2006/main">
             <a:pPr>
+              <a:buNone/>
               <a:defRPr sz="2025" b="0">
                 <a:solidFill>
                   <a:srgbClr val="473229"/>
@@ -7103,6 +7174,7 @@
               </a:defRPr>
             </a:defPPr>
             <a:lvl1pPr>
+              <a:buNone/>
               <a:defRPr sz="4050" b="1">
                 <a:solidFill>
                   <a:srgbClr val="C5A274"/>
@@ -7113,6 +7185,7 @@
               </a:defRPr>
             </a:lvl1pPr>
             <a:lvl2pPr>
+              <a:buNone/>
               <a:defRPr sz="4050" b="1">
                 <a:solidFill>
                   <a:srgbClr val="C5A274"/>
@@ -7123,6 +7196,7 @@
               </a:defRPr>
             </a:lvl2pPr>
             <a:lvl3pPr>
+              <a:buNone/>
               <a:defRPr sz="4050" b="1">
                 <a:solidFill>
                   <a:srgbClr val="C5A274"/>
@@ -7133,6 +7207,7 @@
               </a:defRPr>
             </a:lvl3pPr>
             <a:lvl4pPr>
+              <a:buNone/>
               <a:defRPr sz="4050" b="1">
                 <a:solidFill>
                   <a:srgbClr val="C5A274"/>
@@ -7143,6 +7218,7 @@
               </a:defRPr>
             </a:lvl4pPr>
             <a:lvl5pPr>
+              <a:buNone/>
               <a:defRPr sz="4050" b="1">
                 <a:solidFill>
                   <a:srgbClr val="C5A274"/>
@@ -7153,6 +7229,7 @@
               </a:defRPr>
             </a:lvl5pPr>
             <a:lvl6pPr>
+              <a:buNone/>
               <a:defRPr sz="4050" b="1">
                 <a:solidFill>
                   <a:srgbClr val="C5A274"/>
@@ -7163,6 +7240,7 @@
               </a:defRPr>
             </a:lvl6pPr>
             <a:lvl7pPr>
+              <a:buNone/>
               <a:defRPr sz="4050" b="1">
                 <a:solidFill>
                   <a:srgbClr val="C5A274"/>
@@ -7173,6 +7251,7 @@
               </a:defRPr>
             </a:lvl7pPr>
             <a:lvl8pPr>
+              <a:buNone/>
               <a:defRPr sz="4050" b="1">
                 <a:solidFill>
                   <a:srgbClr val="C5A274"/>
@@ -7183,6 +7262,7 @@
               </a:defRPr>
             </a:lvl8pPr>
             <a:lvl9pPr>
+              <a:buNone/>
               <a:defRPr sz="4050" b="1">
                 <a:solidFill>
                   <a:srgbClr val="C5A274"/>
@@ -7195,6 +7275,7 @@
           </a:lstStyle>
           <a:p xmlns:a="http://schemas.openxmlformats.org/drawingml/2006/main">
             <a:pPr>
+              <a:buNone/>
               <a:defRPr sz="4050" b="1">
                 <a:solidFill>
                   <a:srgbClr val="C5A274"/>
@@ -7259,6 +7340,7 @@
               </a:defRPr>
             </a:defPPr>
             <a:lvl1pPr>
+              <a:buNone/>
               <a:defRPr sz="2325" b="1">
                 <a:solidFill>
                   <a:srgbClr val="684A3A"/>
@@ -7269,6 +7351,7 @@
               </a:defRPr>
             </a:lvl1pPr>
             <a:lvl2pPr>
+              <a:buNone/>
               <a:defRPr sz="2325" b="1">
                 <a:solidFill>
                   <a:srgbClr val="684A3A"/>
@@ -7279,6 +7362,7 @@
               </a:defRPr>
             </a:lvl2pPr>
             <a:lvl3pPr>
+              <a:buNone/>
               <a:defRPr sz="2325" b="1">
                 <a:solidFill>
                   <a:srgbClr val="684A3A"/>
@@ -7289,6 +7373,7 @@
               </a:defRPr>
             </a:lvl3pPr>
             <a:lvl4pPr>
+              <a:buNone/>
               <a:defRPr sz="2325" b="1">
                 <a:solidFill>
                   <a:srgbClr val="684A3A"/>
@@ -7299,6 +7384,7 @@
               </a:defRPr>
             </a:lvl4pPr>
             <a:lvl5pPr>
+              <a:buNone/>
               <a:defRPr sz="2325" b="1">
                 <a:solidFill>
                   <a:srgbClr val="684A3A"/>
@@ -7309,6 +7395,7 @@
               </a:defRPr>
             </a:lvl5pPr>
             <a:lvl6pPr>
+              <a:buNone/>
               <a:defRPr sz="2325" b="1">
                 <a:solidFill>
                   <a:srgbClr val="684A3A"/>
@@ -7319,6 +7406,7 @@
               </a:defRPr>
             </a:lvl6pPr>
             <a:lvl7pPr>
+              <a:buNone/>
               <a:defRPr sz="2325" b="1">
                 <a:solidFill>
                   <a:srgbClr val="684A3A"/>
@@ -7329,6 +7417,7 @@
               </a:defRPr>
             </a:lvl7pPr>
             <a:lvl8pPr>
+              <a:buNone/>
               <a:defRPr sz="2325" b="1">
                 <a:solidFill>
                   <a:srgbClr val="684A3A"/>
@@ -7339,6 +7428,7 @@
               </a:defRPr>
             </a:lvl8pPr>
             <a:lvl9pPr>
+              <a:buNone/>
               <a:defRPr sz="2325" b="1">
                 <a:solidFill>
                   <a:srgbClr val="684A3A"/>
@@ -7351,6 +7441,7 @@
           </a:lstStyle>
           <a:p xmlns:a="http://schemas.openxmlformats.org/drawingml/2006/main">
             <a:pPr>
+              <a:buNone/>
               <a:defRPr sz="2325" b="1">
                 <a:solidFill>
                   <a:srgbClr val="684A3A"/>
@@ -7415,6 +7506,7 @@
               </a:defRPr>
             </a:defPPr>
             <a:lvl1pPr>
+              <a:buNone/>
               <a:defRPr sz="2025" b="0">
                 <a:solidFill>
                   <a:srgbClr val="473229"/>
@@ -7425,6 +7517,7 @@
               </a:defRPr>
             </a:lvl1pPr>
             <a:lvl2pPr>
+              <a:buNone/>
               <a:defRPr sz="2025" b="0">
                 <a:solidFill>
                   <a:srgbClr val="473229"/>
@@ -7435,6 +7528,7 @@
               </a:defRPr>
             </a:lvl2pPr>
             <a:lvl3pPr>
+              <a:buNone/>
               <a:defRPr sz="2025" b="0">
                 <a:solidFill>
                   <a:srgbClr val="473229"/>
@@ -7445,6 +7539,7 @@
               </a:defRPr>
             </a:lvl3pPr>
             <a:lvl4pPr>
+              <a:buNone/>
               <a:defRPr sz="2025" b="0">
                 <a:solidFill>
                   <a:srgbClr val="473229"/>
@@ -7455,6 +7550,7 @@
               </a:defRPr>
             </a:lvl4pPr>
             <a:lvl5pPr>
+              <a:buNone/>
               <a:defRPr sz="2025" b="0">
                 <a:solidFill>
                   <a:srgbClr val="473229"/>
@@ -7465,6 +7561,7 @@
               </a:defRPr>
             </a:lvl5pPr>
             <a:lvl6pPr>
+              <a:buNone/>
               <a:defRPr sz="2025" b="0">
                 <a:solidFill>
                   <a:srgbClr val="473229"/>
@@ -7475,6 +7572,7 @@
               </a:defRPr>
             </a:lvl6pPr>
             <a:lvl7pPr>
+              <a:buNone/>
               <a:defRPr sz="2025" b="0">
                 <a:solidFill>
                   <a:srgbClr val="473229"/>
@@ -7485,6 +7583,7 @@
               </a:defRPr>
             </a:lvl7pPr>
             <a:lvl8pPr>
+              <a:buNone/>
               <a:defRPr sz="2025" b="0">
                 <a:solidFill>
                   <a:srgbClr val="473229"/>
@@ -7495,6 +7594,7 @@
               </a:defRPr>
             </a:lvl8pPr>
             <a:lvl9pPr>
+              <a:buNone/>
               <a:defRPr sz="2025" b="0">
                 <a:solidFill>
                   <a:srgbClr val="473229"/>
@@ -7507,6 +7607,7 @@
           </a:lstStyle>
           <a:p xmlns:a="http://schemas.openxmlformats.org/drawingml/2006/main">
             <a:pPr>
+              <a:buNone/>
               <a:defRPr sz="2025" b="0">
                 <a:solidFill>
                   <a:srgbClr val="473229"/>
@@ -7571,6 +7672,7 @@
               </a:defRPr>
             </a:defPPr>
             <a:lvl1pPr>
+              <a:buNone/>
               <a:defRPr sz="4050" b="1">
                 <a:solidFill>
                   <a:srgbClr val="C5A274"/>
@@ -7581,6 +7683,7 @@
               </a:defRPr>
             </a:lvl1pPr>
             <a:lvl2pPr>
+              <a:buNone/>
               <a:defRPr sz="4050" b="1">
                 <a:solidFill>
                   <a:srgbClr val="C5A274"/>
@@ -7591,6 +7694,7 @@
               </a:defRPr>
             </a:lvl2pPr>
             <a:lvl3pPr>
+              <a:buNone/>
               <a:defRPr sz="4050" b="1">
                 <a:solidFill>
                   <a:srgbClr val="C5A274"/>
@@ -7601,6 +7705,7 @@
               </a:defRPr>
             </a:lvl3pPr>
             <a:lvl4pPr>
+              <a:buNone/>
               <a:defRPr sz="4050" b="1">
                 <a:solidFill>
                   <a:srgbClr val="C5A274"/>
@@ -7611,6 +7716,7 @@
               </a:defRPr>
             </a:lvl4pPr>
             <a:lvl5pPr>
+              <a:buNone/>
               <a:defRPr sz="4050" b="1">
                 <a:solidFill>
                   <a:srgbClr val="C5A274"/>
@@ -7621,6 +7727,7 @@
               </a:defRPr>
             </a:lvl5pPr>
             <a:lvl6pPr>
+              <a:buNone/>
               <a:defRPr sz="4050" b="1">
                 <a:solidFill>
                   <a:srgbClr val="C5A274"/>
@@ -7631,6 +7738,7 @@
               </a:defRPr>
             </a:lvl6pPr>
             <a:lvl7pPr>
+              <a:buNone/>
               <a:defRPr sz="4050" b="1">
                 <a:solidFill>
                   <a:srgbClr val="C5A274"/>
@@ -7641,6 +7749,7 @@
               </a:defRPr>
             </a:lvl7pPr>
             <a:lvl8pPr>
+              <a:buNone/>
               <a:defRPr sz="4050" b="1">
                 <a:solidFill>
                   <a:srgbClr val="C5A274"/>
@@ -7651,6 +7760,7 @@
               </a:defRPr>
             </a:lvl8pPr>
             <a:lvl9pPr>
+              <a:buNone/>
               <a:defRPr sz="4050" b="1">
                 <a:solidFill>
                   <a:srgbClr val="C5A274"/>
@@ -7663,6 +7773,7 @@
           </a:lstStyle>
           <a:p xmlns:a="http://schemas.openxmlformats.org/drawingml/2006/main">
             <a:pPr>
+              <a:buNone/>
               <a:defRPr sz="4050" b="1">
                 <a:solidFill>
                   <a:srgbClr val="C5A274"/>
@@ -7727,6 +7838,7 @@
               </a:defRPr>
             </a:defPPr>
             <a:lvl1pPr>
+              <a:buNone/>
               <a:defRPr sz="2325" b="1">
                 <a:solidFill>
                   <a:srgbClr val="684A3A"/>
@@ -7737,6 +7849,7 @@
               </a:defRPr>
             </a:lvl1pPr>
             <a:lvl2pPr>
+              <a:buNone/>
               <a:defRPr sz="2325" b="1">
                 <a:solidFill>
                   <a:srgbClr val="684A3A"/>
@@ -7747,6 +7860,7 @@
               </a:defRPr>
             </a:lvl2pPr>
             <a:lvl3pPr>
+              <a:buNone/>
               <a:defRPr sz="2325" b="1">
                 <a:solidFill>
                   <a:srgbClr val="684A3A"/>
@@ -7757,6 +7871,7 @@
               </a:defRPr>
             </a:lvl3pPr>
             <a:lvl4pPr>
+              <a:buNone/>
               <a:defRPr sz="2325" b="1">
                 <a:solidFill>
                   <a:srgbClr val="684A3A"/>
@@ -7767,6 +7882,7 @@
               </a:defRPr>
             </a:lvl4pPr>
             <a:lvl5pPr>
+              <a:buNone/>
               <a:defRPr sz="2325" b="1">
                 <a:solidFill>
                   <a:srgbClr val="684A3A"/>
@@ -7777,6 +7893,7 @@
               </a:defRPr>
             </a:lvl5pPr>
             <a:lvl6pPr>
+              <a:buNone/>
               <a:defRPr sz="2325" b="1">
                 <a:solidFill>
                   <a:srgbClr val="684A3A"/>
@@ -7787,6 +7904,7 @@
               </a:defRPr>
             </a:lvl6pPr>
             <a:lvl7pPr>
+              <a:buNone/>
               <a:defRPr sz="2325" b="1">
                 <a:solidFill>
                   <a:srgbClr val="684A3A"/>
@@ -7797,6 +7915,7 @@
               </a:defRPr>
             </a:lvl7pPr>
             <a:lvl8pPr>
+              <a:buNone/>
               <a:defRPr sz="2325" b="1">
                 <a:solidFill>
                   <a:srgbClr val="684A3A"/>
@@ -7807,6 +7926,7 @@
               </a:defRPr>
             </a:lvl8pPr>
             <a:lvl9pPr>
+              <a:buNone/>
               <a:defRPr sz="2325" b="1">
                 <a:solidFill>
                   <a:srgbClr val="684A3A"/>
@@ -7819,6 +7939,7 @@
           </a:lstStyle>
           <a:p xmlns:a="http://schemas.openxmlformats.org/drawingml/2006/main">
             <a:pPr>
+              <a:buNone/>
               <a:defRPr sz="2325" b="1">
                 <a:solidFill>
                   <a:srgbClr val="684A3A"/>
@@ -7883,6 +8004,7 @@
               </a:defRPr>
             </a:defPPr>
             <a:lvl1pPr>
+              <a:buNone/>
               <a:defRPr sz="2025" b="0">
                 <a:solidFill>
                   <a:srgbClr val="473229"/>
@@ -7893,6 +8015,7 @@
               </a:defRPr>
             </a:lvl1pPr>
             <a:lvl2pPr>
+              <a:buNone/>
               <a:defRPr sz="2025" b="0">
                 <a:solidFill>
                   <a:srgbClr val="473229"/>
@@ -7903,6 +8026,7 @@
               </a:defRPr>
             </a:lvl2pPr>
             <a:lvl3pPr>
+              <a:buNone/>
               <a:defRPr sz="2025" b="0">
                 <a:solidFill>
                   <a:srgbClr val="473229"/>
@@ -7913,6 +8037,7 @@
               </a:defRPr>
             </a:lvl3pPr>
             <a:lvl4pPr>
+              <a:buNone/>
               <a:defRPr sz="2025" b="0">
                 <a:solidFill>
                   <a:srgbClr val="473229"/>
@@ -7923,6 +8048,7 @@
               </a:defRPr>
             </a:lvl4pPr>
             <a:lvl5pPr>
+              <a:buNone/>
               <a:defRPr sz="2025" b="0">
                 <a:solidFill>
                   <a:srgbClr val="473229"/>
@@ -7933,6 +8059,7 @@
               </a:defRPr>
             </a:lvl5pPr>
             <a:lvl6pPr>
+              <a:buNone/>
               <a:defRPr sz="2025" b="0">
                 <a:solidFill>
                   <a:srgbClr val="473229"/>
@@ -7943,6 +8070,7 @@
               </a:defRPr>
             </a:lvl6pPr>
             <a:lvl7pPr>
+              <a:buNone/>
               <a:defRPr sz="2025" b="0">
                 <a:solidFill>
                   <a:srgbClr val="473229"/>
@@ -7953,6 +8081,7 @@
               </a:defRPr>
             </a:lvl7pPr>
             <a:lvl8pPr>
+              <a:buNone/>
               <a:defRPr sz="2025" b="0">
                 <a:solidFill>
                   <a:srgbClr val="473229"/>
@@ -7963,6 +8092,7 @@
               </a:defRPr>
             </a:lvl8pPr>
             <a:lvl9pPr>
+              <a:buNone/>
               <a:defRPr sz="2025" b="0">
                 <a:solidFill>
                   <a:srgbClr val="473229"/>
@@ -7975,6 +8105,7 @@
           </a:lstStyle>
           <a:p xmlns:a="http://schemas.openxmlformats.org/drawingml/2006/main">
             <a:pPr>
+              <a:buNone/>
               <a:defRPr sz="2025" b="0">
                 <a:solidFill>
                   <a:srgbClr val="473229"/>
@@ -8560,7 +8691,7 @@
           <p:cNvPr id="8" name="">
             <a:extLst xmlns:a="http://schemas.openxmlformats.org/drawingml/2006/main">
               <a:ext uri="{FF2B5EF4-FFF2-40B4-BE49-F238E27FC236}">
-                <a16:creationId xmlns:a16="http://schemas.microsoft.com/office/drawing/2014/main" id="{317B0AB2-0565-4DE9-B1FB-2BBBF74C92CF}"/>
+                <a16:creationId xmlns:a16="http://schemas.microsoft.com/office/drawing/2014/main" id="{56912F0F-4042-4D94-B68B-F13B9AEDC46D}"/>
               </a:ext>
             </a:extLst>
           </p:cNvPr>
@@ -8570,7 +8701,7 @@
           <p:nvPr/>
         </p:nvPicPr>
         <p:blipFill>
-          <a:blip xmlns:r="http://schemas.openxmlformats.org/officeDocument/2006/relationships" xmlns:a="http://schemas.openxmlformats.org/drawingml/2006/main" r:embed="R075e4a7646cd457a"/>
+          <a:blip xmlns:r="http://schemas.openxmlformats.org/officeDocument/2006/relationships" xmlns:a="http://schemas.openxmlformats.org/drawingml/2006/main" r:embed="R5873538696cf46d3"/>
           <a:stretch xmlns:a="http://schemas.openxmlformats.org/drawingml/2006/main"/>
         </p:blipFill>
         <p:spPr>
@@ -8624,6 +8755,7 @@
               </a:defRPr>
             </a:defPPr>
             <a:lvl1pPr>
+              <a:buNone/>
               <a:defRPr sz="1800" b="0">
                 <a:solidFill>
                   <a:srgbClr val="684A3A"/>
@@ -8634,6 +8766,7 @@
               </a:defRPr>
             </a:lvl1pPr>
             <a:lvl2pPr>
+              <a:buNone/>
               <a:defRPr sz="1800" b="0">
                 <a:solidFill>
                   <a:srgbClr val="684A3A"/>
@@ -8644,6 +8777,7 @@
               </a:defRPr>
             </a:lvl2pPr>
             <a:lvl3pPr>
+              <a:buNone/>
               <a:defRPr sz="1800" b="0">
                 <a:solidFill>
                   <a:srgbClr val="684A3A"/>
@@ -8654,6 +8788,7 @@
               </a:defRPr>
             </a:lvl3pPr>
             <a:lvl4pPr>
+              <a:buNone/>
               <a:defRPr sz="1800" b="0">
                 <a:solidFill>
                   <a:srgbClr val="684A3A"/>
@@ -8664,6 +8799,7 @@
               </a:defRPr>
             </a:lvl4pPr>
             <a:lvl5pPr>
+              <a:buNone/>
               <a:defRPr sz="1800" b="0">
                 <a:solidFill>
                   <a:srgbClr val="684A3A"/>
@@ -8674,6 +8810,7 @@
               </a:defRPr>
             </a:lvl5pPr>
             <a:lvl6pPr>
+              <a:buNone/>
               <a:defRPr sz="1800" b="0">
                 <a:solidFill>
                   <a:srgbClr val="684A3A"/>
@@ -8684,6 +8821,7 @@
               </a:defRPr>
             </a:lvl6pPr>
             <a:lvl7pPr>
+              <a:buNone/>
               <a:defRPr sz="1800" b="0">
                 <a:solidFill>
                   <a:srgbClr val="684A3A"/>
@@ -8694,6 +8832,7 @@
               </a:defRPr>
             </a:lvl7pPr>
             <a:lvl8pPr>
+              <a:buNone/>
               <a:defRPr sz="1800" b="0">
                 <a:solidFill>
                   <a:srgbClr val="684A3A"/>
@@ -8704,6 +8843,7 @@
               </a:defRPr>
             </a:lvl8pPr>
             <a:lvl9pPr>
+              <a:buNone/>
               <a:defRPr sz="1800" b="0">
                 <a:solidFill>
                   <a:srgbClr val="684A3A"/>
@@ -8716,6 +8856,7 @@
           </a:lstStyle>
           <a:p xmlns:a="http://schemas.openxmlformats.org/drawingml/2006/main">
             <a:pPr>
+              <a:buNone/>
               <a:defRPr sz="1800" b="0">
                 <a:solidFill>
                   <a:srgbClr val="684A3A"/>
@@ -8773,7 +8914,7 @@
           <p:cNvPr id="43" name="">
             <a:extLst xmlns:a="http://schemas.openxmlformats.org/drawingml/2006/main">
               <a:ext uri="{FF2B5EF4-FFF2-40B4-BE49-F238E27FC236}">
-                <a16:creationId xmlns:a16="http://schemas.microsoft.com/office/drawing/2014/main" id="{5A8A651E-CEE4-4347-BA43-59F895274681}"/>
+                <a16:creationId xmlns:a16="http://schemas.microsoft.com/office/drawing/2014/main" id="{D101EEF9-55CA-4B7C-A615-562D286832EC}"/>
               </a:ext>
             </a:extLst>
           </p:cNvPr>
@@ -8804,7 +8945,7 @@
           <p:cNvPr id="42" name="">
             <a:extLst xmlns:a="http://schemas.openxmlformats.org/drawingml/2006/main">
               <a:ext uri="{FF2B5EF4-FFF2-40B4-BE49-F238E27FC236}">
-                <a16:creationId xmlns:a16="http://schemas.microsoft.com/office/drawing/2014/main" id="{431B79BB-9312-4588-90E3-C4F20EEF19C3}"/>
+                <a16:creationId xmlns:a16="http://schemas.microsoft.com/office/drawing/2014/main" id="{82FA5692-EDA4-4F16-AD19-FAA9D2ED11F9}"/>
               </a:ext>
             </a:extLst>
           </p:cNvPr>
@@ -8839,7 +8980,7 @@
           <p:cNvPr id="39" name="">
             <a:extLst xmlns:a="http://schemas.openxmlformats.org/drawingml/2006/main">
               <a:ext uri="{FF2B5EF4-FFF2-40B4-BE49-F238E27FC236}">
-                <a16:creationId xmlns:a16="http://schemas.microsoft.com/office/drawing/2014/main" id="{3F73E589-C8D2-4FBD-A217-83B0752BB42E}"/>
+                <a16:creationId xmlns:a16="http://schemas.microsoft.com/office/drawing/2014/main" id="{AFE82E24-01B2-4C21-A6BD-93B7CC9EE89A}"/>
               </a:ext>
             </a:extLst>
           </p:cNvPr>
@@ -8870,7 +9011,7 @@
           <p:cNvPr id="38" name="">
             <a:extLst xmlns:a="http://schemas.openxmlformats.org/drawingml/2006/main">
               <a:ext uri="{FF2B5EF4-FFF2-40B4-BE49-F238E27FC236}">
-                <a16:creationId xmlns:a16="http://schemas.microsoft.com/office/drawing/2014/main" id="{357AEA88-B9F9-4DB3-9F7C-489C3813144B}"/>
+                <a16:creationId xmlns:a16="http://schemas.microsoft.com/office/drawing/2014/main" id="{DF2BF020-477F-4709-95F7-3EBF28441727}"/>
               </a:ext>
             </a:extLst>
           </p:cNvPr>
@@ -8901,7 +9042,7 @@
           <p:cNvPr id="37" name="">
             <a:extLst xmlns:a="http://schemas.openxmlformats.org/drawingml/2006/main">
               <a:ext uri="{FF2B5EF4-FFF2-40B4-BE49-F238E27FC236}">
-                <a16:creationId xmlns:a16="http://schemas.microsoft.com/office/drawing/2014/main" id="{2B467B5E-511B-422F-811E-2B6BABB01296}"/>
+                <a16:creationId xmlns:a16="http://schemas.microsoft.com/office/drawing/2014/main" id="{AF246F15-34CB-4EC1-8382-547A2434A3F1}"/>
               </a:ext>
             </a:extLst>
           </p:cNvPr>
@@ -8932,7 +9073,7 @@
           <p:cNvPr id="36" name="">
             <a:extLst xmlns:a="http://schemas.openxmlformats.org/drawingml/2006/main">
               <a:ext uri="{FF2B5EF4-FFF2-40B4-BE49-F238E27FC236}">
-                <a16:creationId xmlns:a16="http://schemas.microsoft.com/office/drawing/2014/main" id="{859949CD-6B1E-4102-BD34-FA7DFA998117}"/>
+                <a16:creationId xmlns:a16="http://schemas.microsoft.com/office/drawing/2014/main" id="{6BFB0627-F524-4608-AB9B-310D3E6BAEE7}"/>
               </a:ext>
             </a:extLst>
           </p:cNvPr>
@@ -9557,6 +9698,7 @@
               </a:defRPr>
             </a:defPPr>
             <a:lvl1pPr>
+              <a:buNone/>
               <a:defRPr sz="2025" b="1">
                 <a:solidFill>
                   <a:srgbClr val="684A3A"/>
@@ -9567,6 +9709,7 @@
               </a:defRPr>
             </a:lvl1pPr>
             <a:lvl2pPr>
+              <a:buNone/>
               <a:defRPr sz="2025" b="1">
                 <a:solidFill>
                   <a:srgbClr val="684A3A"/>
@@ -9577,6 +9720,7 @@
               </a:defRPr>
             </a:lvl2pPr>
             <a:lvl3pPr>
+              <a:buNone/>
               <a:defRPr sz="2025" b="1">
                 <a:solidFill>
                   <a:srgbClr val="684A3A"/>
@@ -9587,6 +9731,7 @@
               </a:defRPr>
             </a:lvl3pPr>
             <a:lvl4pPr>
+              <a:buNone/>
               <a:defRPr sz="2025" b="1">
                 <a:solidFill>
                   <a:srgbClr val="684A3A"/>
@@ -9597,6 +9742,7 @@
               </a:defRPr>
             </a:lvl4pPr>
             <a:lvl5pPr>
+              <a:buNone/>
               <a:defRPr sz="2025" b="1">
                 <a:solidFill>
                   <a:srgbClr val="684A3A"/>
@@ -9607,6 +9753,7 @@
               </a:defRPr>
             </a:lvl5pPr>
             <a:lvl6pPr>
+              <a:buNone/>
               <a:defRPr sz="2025" b="1">
                 <a:solidFill>
                   <a:srgbClr val="684A3A"/>
@@ -9617,6 +9764,7 @@
               </a:defRPr>
             </a:lvl6pPr>
             <a:lvl7pPr>
+              <a:buNone/>
               <a:defRPr sz="2025" b="1">
                 <a:solidFill>
                   <a:srgbClr val="684A3A"/>
@@ -9627,6 +9775,7 @@
               </a:defRPr>
             </a:lvl7pPr>
             <a:lvl8pPr>
+              <a:buNone/>
               <a:defRPr sz="2025" b="1">
                 <a:solidFill>
                   <a:srgbClr val="684A3A"/>
@@ -9637,6 +9786,7 @@
               </a:defRPr>
             </a:lvl8pPr>
             <a:lvl9pPr>
+              <a:buNone/>
               <a:defRPr sz="2025" b="1">
                 <a:solidFill>
                   <a:srgbClr val="684A3A"/>
@@ -9649,6 +9799,7 @@
           </a:lstStyle>
           <a:p xmlns:a="http://schemas.openxmlformats.org/drawingml/2006/main">
             <a:pPr>
+              <a:buNone/>
               <a:defRPr sz="2025" b="1">
                 <a:solidFill>
                   <a:srgbClr val="684A3A"/>
@@ -9713,6 +9864,7 @@
               </a:defRPr>
             </a:defPPr>
             <a:lvl1pPr>
+              <a:buNone/>
               <a:defRPr sz="1725" b="0">
                 <a:solidFill>
                   <a:srgbClr val="473229"/>
@@ -9723,6 +9875,7 @@
               </a:defRPr>
             </a:lvl1pPr>
             <a:lvl2pPr>
+              <a:buNone/>
               <a:defRPr sz="1725" b="0">
                 <a:solidFill>
                   <a:srgbClr val="473229"/>
@@ -9733,6 +9886,7 @@
               </a:defRPr>
             </a:lvl2pPr>
             <a:lvl3pPr>
+              <a:buNone/>
               <a:defRPr sz="1725" b="0">
                 <a:solidFill>
                   <a:srgbClr val="473229"/>
@@ -9743,6 +9897,7 @@
               </a:defRPr>
             </a:lvl3pPr>
             <a:lvl4pPr>
+              <a:buNone/>
               <a:defRPr sz="1725" b="0">
                 <a:solidFill>
                   <a:srgbClr val="473229"/>
@@ -9753,6 +9908,7 @@
               </a:defRPr>
             </a:lvl4pPr>
             <a:lvl5pPr>
+              <a:buNone/>
               <a:defRPr sz="1725" b="0">
                 <a:solidFill>
                   <a:srgbClr val="473229"/>
@@ -9763,6 +9919,7 @@
               </a:defRPr>
             </a:lvl5pPr>
             <a:lvl6pPr>
+              <a:buNone/>
               <a:defRPr sz="1725" b="0">
                 <a:solidFill>
                   <a:srgbClr val="473229"/>
@@ -9773,6 +9930,7 @@
               </a:defRPr>
             </a:lvl6pPr>
             <a:lvl7pPr>
+              <a:buNone/>
               <a:defRPr sz="1725" b="0">
                 <a:solidFill>
                   <a:srgbClr val="473229"/>
@@ -9783,6 +9941,7 @@
               </a:defRPr>
             </a:lvl7pPr>
             <a:lvl8pPr>
+              <a:buNone/>
               <a:defRPr sz="1725" b="0">
                 <a:solidFill>
                   <a:srgbClr val="473229"/>
@@ -9793,6 +9952,7 @@
               </a:defRPr>
             </a:lvl8pPr>
             <a:lvl9pPr>
+              <a:buNone/>
               <a:defRPr sz="1725" b="0">
                 <a:solidFill>
                   <a:srgbClr val="473229"/>
@@ -9805,6 +9965,7 @@
           </a:lstStyle>
           <a:p xmlns:a="http://schemas.openxmlformats.org/drawingml/2006/main">
             <a:pPr>
+              <a:buNone/>
               <a:defRPr sz="1725" b="0">
                 <a:solidFill>
                   <a:srgbClr val="473229"/>
@@ -9823,11 +9984,12 @@
                 <a:ea typeface="Segoe UI"/>
                 <a:cs typeface="Segoe UI"/>
               </a:rPr>
-              <a:t>Read-only</a:t>
+              <a:t>Fresh query</a:t>
             </a:r>
           </a:p>
           <a:p xmlns:a="http://schemas.openxmlformats.org/drawingml/2006/main">
             <a:pPr>
+              <a:buNone/>
               <a:defRPr sz="1725" b="0">
                 <a:solidFill>
                   <a:srgbClr val="473229"/>
@@ -9846,7 +10008,7 @@
                 <a:ea typeface="Segoe UI"/>
                 <a:cs typeface="Segoe UI"/>
               </a:rPr>
-              <a:t>candidate view</a:t>
+              <a:t>before analysis</a:t>
             </a:r>
           </a:p>
         </p:txBody>
@@ -9922,6 +10084,7 @@
               </a:defRPr>
             </a:defPPr>
             <a:lvl1pPr>
+              <a:buNone/>
               <a:defRPr sz="2025" b="1">
                 <a:solidFill>
                   <a:srgbClr val="684A3A"/>
@@ -9932,6 +10095,7 @@
               </a:defRPr>
             </a:lvl1pPr>
             <a:lvl2pPr>
+              <a:buNone/>
               <a:defRPr sz="2025" b="1">
                 <a:solidFill>
                   <a:srgbClr val="684A3A"/>
@@ -9942,6 +10106,7 @@
               </a:defRPr>
             </a:lvl2pPr>
             <a:lvl3pPr>
+              <a:buNone/>
               <a:defRPr sz="2025" b="1">
                 <a:solidFill>
                   <a:srgbClr val="684A3A"/>
@@ -9952,6 +10117,7 @@
               </a:defRPr>
             </a:lvl3pPr>
             <a:lvl4pPr>
+              <a:buNone/>
               <a:defRPr sz="2025" b="1">
                 <a:solidFill>
                   <a:srgbClr val="684A3A"/>
@@ -9962,6 +10128,7 @@
               </a:defRPr>
             </a:lvl4pPr>
             <a:lvl5pPr>
+              <a:buNone/>
               <a:defRPr sz="2025" b="1">
                 <a:solidFill>
                   <a:srgbClr val="684A3A"/>
@@ -9972,6 +10139,7 @@
               </a:defRPr>
             </a:lvl5pPr>
             <a:lvl6pPr>
+              <a:buNone/>
               <a:defRPr sz="2025" b="1">
                 <a:solidFill>
                   <a:srgbClr val="684A3A"/>
@@ -9982,6 +10150,7 @@
               </a:defRPr>
             </a:lvl6pPr>
             <a:lvl7pPr>
+              <a:buNone/>
               <a:defRPr sz="2025" b="1">
                 <a:solidFill>
                   <a:srgbClr val="684A3A"/>
@@ -9992,6 +10161,7 @@
               </a:defRPr>
             </a:lvl7pPr>
             <a:lvl8pPr>
+              <a:buNone/>
               <a:defRPr sz="2025" b="1">
                 <a:solidFill>
                   <a:srgbClr val="684A3A"/>
@@ -10002,6 +10172,7 @@
               </a:defRPr>
             </a:lvl8pPr>
             <a:lvl9pPr>
+              <a:buNone/>
               <a:defRPr sz="2025" b="1">
                 <a:solidFill>
                   <a:srgbClr val="684A3A"/>
@@ -10014,6 +10185,7 @@
           </a:lstStyle>
           <a:p xmlns:a="http://schemas.openxmlformats.org/drawingml/2006/main">
             <a:pPr>
+              <a:buNone/>
               <a:defRPr sz="2025" b="1">
                 <a:solidFill>
                   <a:srgbClr val="684A3A"/>
@@ -10078,6 +10250,7 @@
               </a:defRPr>
             </a:defPPr>
             <a:lvl1pPr>
+              <a:buNone/>
               <a:defRPr sz="1725" b="0">
                 <a:solidFill>
                   <a:srgbClr val="473229"/>
@@ -10088,6 +10261,7 @@
               </a:defRPr>
             </a:lvl1pPr>
             <a:lvl2pPr>
+              <a:buNone/>
               <a:defRPr sz="1725" b="0">
                 <a:solidFill>
                   <a:srgbClr val="473229"/>
@@ -10098,6 +10272,7 @@
               </a:defRPr>
             </a:lvl2pPr>
             <a:lvl3pPr>
+              <a:buNone/>
               <a:defRPr sz="1725" b="0">
                 <a:solidFill>
                   <a:srgbClr val="473229"/>
@@ -10108,6 +10283,7 @@
               </a:defRPr>
             </a:lvl3pPr>
             <a:lvl4pPr>
+              <a:buNone/>
               <a:defRPr sz="1725" b="0">
                 <a:solidFill>
                   <a:srgbClr val="473229"/>
@@ -10118,6 +10294,7 @@
               </a:defRPr>
             </a:lvl4pPr>
             <a:lvl5pPr>
+              <a:buNone/>
               <a:defRPr sz="1725" b="0">
                 <a:solidFill>
                   <a:srgbClr val="473229"/>
@@ -10128,6 +10305,7 @@
               </a:defRPr>
             </a:lvl5pPr>
             <a:lvl6pPr>
+              <a:buNone/>
               <a:defRPr sz="1725" b="0">
                 <a:solidFill>
                   <a:srgbClr val="473229"/>
@@ -10138,6 +10316,7 @@
               </a:defRPr>
             </a:lvl6pPr>
             <a:lvl7pPr>
+              <a:buNone/>
               <a:defRPr sz="1725" b="0">
                 <a:solidFill>
                   <a:srgbClr val="473229"/>
@@ -10148,6 +10327,7 @@
               </a:defRPr>
             </a:lvl7pPr>
             <a:lvl8pPr>
+              <a:buNone/>
               <a:defRPr sz="1725" b="0">
                 <a:solidFill>
                   <a:srgbClr val="473229"/>
@@ -10158,6 +10338,7 @@
               </a:defRPr>
             </a:lvl8pPr>
             <a:lvl9pPr>
+              <a:buNone/>
               <a:defRPr sz="1725" b="0">
                 <a:solidFill>
                   <a:srgbClr val="473229"/>
@@ -10170,6 +10351,7 @@
           </a:lstStyle>
           <a:p xmlns:a="http://schemas.openxmlformats.org/drawingml/2006/main">
             <a:pPr>
+              <a:buNone/>
               <a:defRPr sz="1725" b="0">
                 <a:solidFill>
                   <a:srgbClr val="473229"/>
@@ -10193,6 +10375,7 @@
           </a:p>
           <a:p xmlns:a="http://schemas.openxmlformats.org/drawingml/2006/main">
             <a:pPr>
+              <a:buNone/>
               <a:defRPr sz="1725" b="0">
                 <a:solidFill>
                   <a:srgbClr val="473229"/>
@@ -10287,6 +10470,7 @@
               </a:defRPr>
             </a:defPPr>
             <a:lvl1pPr>
+              <a:buNone/>
               <a:defRPr sz="2025" b="1">
                 <a:solidFill>
                   <a:srgbClr val="684A3A"/>
@@ -10297,6 +10481,7 @@
               </a:defRPr>
             </a:lvl1pPr>
             <a:lvl2pPr>
+              <a:buNone/>
               <a:defRPr sz="2025" b="1">
                 <a:solidFill>
                   <a:srgbClr val="684A3A"/>
@@ -10307,6 +10492,7 @@
               </a:defRPr>
             </a:lvl2pPr>
             <a:lvl3pPr>
+              <a:buNone/>
               <a:defRPr sz="2025" b="1">
                 <a:solidFill>
                   <a:srgbClr val="684A3A"/>
@@ -10317,6 +10503,7 @@
               </a:defRPr>
             </a:lvl3pPr>
             <a:lvl4pPr>
+              <a:buNone/>
               <a:defRPr sz="2025" b="1">
                 <a:solidFill>
                   <a:srgbClr val="684A3A"/>
@@ -10327,6 +10514,7 @@
               </a:defRPr>
             </a:lvl4pPr>
             <a:lvl5pPr>
+              <a:buNone/>
               <a:defRPr sz="2025" b="1">
                 <a:solidFill>
                   <a:srgbClr val="684A3A"/>
@@ -10337,6 +10525,7 @@
               </a:defRPr>
             </a:lvl5pPr>
             <a:lvl6pPr>
+              <a:buNone/>
               <a:defRPr sz="2025" b="1">
                 <a:solidFill>
                   <a:srgbClr val="684A3A"/>
@@ -10347,6 +10536,7 @@
               </a:defRPr>
             </a:lvl6pPr>
             <a:lvl7pPr>
+              <a:buNone/>
               <a:defRPr sz="2025" b="1">
                 <a:solidFill>
                   <a:srgbClr val="684A3A"/>
@@ -10357,6 +10547,7 @@
               </a:defRPr>
             </a:lvl7pPr>
             <a:lvl8pPr>
+              <a:buNone/>
               <a:defRPr sz="2025" b="1">
                 <a:solidFill>
                   <a:srgbClr val="684A3A"/>
@@ -10367,6 +10558,7 @@
               </a:defRPr>
             </a:lvl8pPr>
             <a:lvl9pPr>
+              <a:buNone/>
               <a:defRPr sz="2025" b="1">
                 <a:solidFill>
                   <a:srgbClr val="684A3A"/>
@@ -10379,6 +10571,7 @@
           </a:lstStyle>
           <a:p xmlns:a="http://schemas.openxmlformats.org/drawingml/2006/main">
             <a:pPr>
+              <a:buNone/>
               <a:defRPr sz="2025" b="1">
                 <a:solidFill>
                   <a:srgbClr val="684A3A"/>
@@ -10443,6 +10636,7 @@
               </a:defRPr>
             </a:defPPr>
             <a:lvl1pPr>
+              <a:buNone/>
               <a:defRPr sz="1725" b="0">
                 <a:solidFill>
                   <a:srgbClr val="473229"/>
@@ -10453,6 +10647,7 @@
               </a:defRPr>
             </a:lvl1pPr>
             <a:lvl2pPr>
+              <a:buNone/>
               <a:defRPr sz="1725" b="0">
                 <a:solidFill>
                   <a:srgbClr val="473229"/>
@@ -10463,6 +10658,7 @@
               </a:defRPr>
             </a:lvl2pPr>
             <a:lvl3pPr>
+              <a:buNone/>
               <a:defRPr sz="1725" b="0">
                 <a:solidFill>
                   <a:srgbClr val="473229"/>
@@ -10473,6 +10669,7 @@
               </a:defRPr>
             </a:lvl3pPr>
             <a:lvl4pPr>
+              <a:buNone/>
               <a:defRPr sz="1725" b="0">
                 <a:solidFill>
                   <a:srgbClr val="473229"/>
@@ -10483,6 +10680,7 @@
               </a:defRPr>
             </a:lvl4pPr>
             <a:lvl5pPr>
+              <a:buNone/>
               <a:defRPr sz="1725" b="0">
                 <a:solidFill>
                   <a:srgbClr val="473229"/>
@@ -10493,6 +10691,7 @@
               </a:defRPr>
             </a:lvl5pPr>
             <a:lvl6pPr>
+              <a:buNone/>
               <a:defRPr sz="1725" b="0">
                 <a:solidFill>
                   <a:srgbClr val="473229"/>
@@ -10503,6 +10702,7 @@
               </a:defRPr>
             </a:lvl6pPr>
             <a:lvl7pPr>
+              <a:buNone/>
               <a:defRPr sz="1725" b="0">
                 <a:solidFill>
                   <a:srgbClr val="473229"/>
@@ -10513,6 +10713,7 @@
               </a:defRPr>
             </a:lvl7pPr>
             <a:lvl8pPr>
+              <a:buNone/>
               <a:defRPr sz="1725" b="0">
                 <a:solidFill>
                   <a:srgbClr val="473229"/>
@@ -10523,6 +10724,7 @@
               </a:defRPr>
             </a:lvl8pPr>
             <a:lvl9pPr>
+              <a:buNone/>
               <a:defRPr sz="1725" b="0">
                 <a:solidFill>
                   <a:srgbClr val="473229"/>
@@ -10535,6 +10737,7 @@
           </a:lstStyle>
           <a:p xmlns:a="http://schemas.openxmlformats.org/drawingml/2006/main">
             <a:pPr>
+              <a:buNone/>
               <a:defRPr sz="1725" b="0">
                 <a:solidFill>
                   <a:srgbClr val="473229"/>
@@ -10558,6 +10761,7 @@
           </a:p>
           <a:p xmlns:a="http://schemas.openxmlformats.org/drawingml/2006/main">
             <a:pPr>
+              <a:buNone/>
               <a:defRPr sz="1725" b="0">
                 <a:solidFill>
                   <a:srgbClr val="473229"/>
@@ -10652,6 +10856,7 @@
               </a:defRPr>
             </a:defPPr>
             <a:lvl1pPr>
+              <a:buNone/>
               <a:defRPr sz="2025" b="1">
                 <a:solidFill>
                   <a:srgbClr val="684A3A"/>
@@ -10662,6 +10867,7 @@
               </a:defRPr>
             </a:lvl1pPr>
             <a:lvl2pPr>
+              <a:buNone/>
               <a:defRPr sz="2025" b="1">
                 <a:solidFill>
                   <a:srgbClr val="684A3A"/>
@@ -10672,6 +10878,7 @@
               </a:defRPr>
             </a:lvl2pPr>
             <a:lvl3pPr>
+              <a:buNone/>
               <a:defRPr sz="2025" b="1">
                 <a:solidFill>
                   <a:srgbClr val="684A3A"/>
@@ -10682,6 +10889,7 @@
               </a:defRPr>
             </a:lvl3pPr>
             <a:lvl4pPr>
+              <a:buNone/>
               <a:defRPr sz="2025" b="1">
                 <a:solidFill>
                   <a:srgbClr val="684A3A"/>
@@ -10692,6 +10900,7 @@
               </a:defRPr>
             </a:lvl4pPr>
             <a:lvl5pPr>
+              <a:buNone/>
               <a:defRPr sz="2025" b="1">
                 <a:solidFill>
                   <a:srgbClr val="684A3A"/>
@@ -10702,6 +10911,7 @@
               </a:defRPr>
             </a:lvl5pPr>
             <a:lvl6pPr>
+              <a:buNone/>
               <a:defRPr sz="2025" b="1">
                 <a:solidFill>
                   <a:srgbClr val="684A3A"/>
@@ -10712,6 +10922,7 @@
               </a:defRPr>
             </a:lvl6pPr>
             <a:lvl7pPr>
+              <a:buNone/>
               <a:defRPr sz="2025" b="1">
                 <a:solidFill>
                   <a:srgbClr val="684A3A"/>
@@ -10722,6 +10933,7 @@
               </a:defRPr>
             </a:lvl7pPr>
             <a:lvl8pPr>
+              <a:buNone/>
               <a:defRPr sz="2025" b="1">
                 <a:solidFill>
                   <a:srgbClr val="684A3A"/>
@@ -10732,6 +10944,7 @@
               </a:defRPr>
             </a:lvl8pPr>
             <a:lvl9pPr>
+              <a:buNone/>
               <a:defRPr sz="2025" b="1">
                 <a:solidFill>
                   <a:srgbClr val="684A3A"/>
@@ -10744,6 +10957,7 @@
           </a:lstStyle>
           <a:p xmlns:a="http://schemas.openxmlformats.org/drawingml/2006/main">
             <a:pPr>
+              <a:buNone/>
               <a:defRPr sz="2025" b="1">
                 <a:solidFill>
                   <a:srgbClr val="684A3A"/>
@@ -10808,6 +11022,7 @@
               </a:defRPr>
             </a:defPPr>
             <a:lvl1pPr>
+              <a:buNone/>
               <a:defRPr sz="1725" b="0">
                 <a:solidFill>
                   <a:srgbClr val="473229"/>
@@ -10818,6 +11033,7 @@
               </a:defRPr>
             </a:lvl1pPr>
             <a:lvl2pPr>
+              <a:buNone/>
               <a:defRPr sz="1725" b="0">
                 <a:solidFill>
                   <a:srgbClr val="473229"/>
@@ -10828,6 +11044,7 @@
               </a:defRPr>
             </a:lvl2pPr>
             <a:lvl3pPr>
+              <a:buNone/>
               <a:defRPr sz="1725" b="0">
                 <a:solidFill>
                   <a:srgbClr val="473229"/>
@@ -10838,6 +11055,7 @@
               </a:defRPr>
             </a:lvl3pPr>
             <a:lvl4pPr>
+              <a:buNone/>
               <a:defRPr sz="1725" b="0">
                 <a:solidFill>
                   <a:srgbClr val="473229"/>
@@ -10848,6 +11066,7 @@
               </a:defRPr>
             </a:lvl4pPr>
             <a:lvl5pPr>
+              <a:buNone/>
               <a:defRPr sz="1725" b="0">
                 <a:solidFill>
                   <a:srgbClr val="473229"/>
@@ -10858,6 +11077,7 @@
               </a:defRPr>
             </a:lvl5pPr>
             <a:lvl6pPr>
+              <a:buNone/>
               <a:defRPr sz="1725" b="0">
                 <a:solidFill>
                   <a:srgbClr val="473229"/>
@@ -10868,6 +11088,7 @@
               </a:defRPr>
             </a:lvl6pPr>
             <a:lvl7pPr>
+              <a:buNone/>
               <a:defRPr sz="1725" b="0">
                 <a:solidFill>
                   <a:srgbClr val="473229"/>
@@ -10878,6 +11099,7 @@
               </a:defRPr>
             </a:lvl7pPr>
             <a:lvl8pPr>
+              <a:buNone/>
               <a:defRPr sz="1725" b="0">
                 <a:solidFill>
                   <a:srgbClr val="473229"/>
@@ -10888,6 +11110,7 @@
               </a:defRPr>
             </a:lvl8pPr>
             <a:lvl9pPr>
+              <a:buNone/>
               <a:defRPr sz="1725" b="0">
                 <a:solidFill>
                   <a:srgbClr val="473229"/>
@@ -10900,6 +11123,7 @@
           </a:lstStyle>
           <a:p xmlns:a="http://schemas.openxmlformats.org/drawingml/2006/main">
             <a:pPr>
+              <a:buNone/>
               <a:defRPr sz="1725" b="0">
                 <a:solidFill>
                   <a:srgbClr val="473229"/>
@@ -10923,6 +11147,7 @@
           </a:p>
           <a:p xmlns:a="http://schemas.openxmlformats.org/drawingml/2006/main">
             <a:pPr>
+              <a:buNone/>
               <a:defRPr sz="1725" b="0">
                 <a:solidFill>
                   <a:srgbClr val="473229"/>
@@ -11017,6 +11242,7 @@
               </a:defRPr>
             </a:defPPr>
             <a:lvl1pPr>
+              <a:buNone/>
               <a:defRPr sz="2025" b="1">
                 <a:solidFill>
                   <a:srgbClr val="684A3A"/>
@@ -11027,6 +11253,7 @@
               </a:defRPr>
             </a:lvl1pPr>
             <a:lvl2pPr>
+              <a:buNone/>
               <a:defRPr sz="2025" b="1">
                 <a:solidFill>
                   <a:srgbClr val="684A3A"/>
@@ -11037,6 +11264,7 @@
               </a:defRPr>
             </a:lvl2pPr>
             <a:lvl3pPr>
+              <a:buNone/>
               <a:defRPr sz="2025" b="1">
                 <a:solidFill>
                   <a:srgbClr val="684A3A"/>
@@ -11047,6 +11275,7 @@
               </a:defRPr>
             </a:lvl3pPr>
             <a:lvl4pPr>
+              <a:buNone/>
               <a:defRPr sz="2025" b="1">
                 <a:solidFill>
                   <a:srgbClr val="684A3A"/>
@@ -11057,6 +11286,7 @@
               </a:defRPr>
             </a:lvl4pPr>
             <a:lvl5pPr>
+              <a:buNone/>
               <a:defRPr sz="2025" b="1">
                 <a:solidFill>
                   <a:srgbClr val="684A3A"/>
@@ -11067,6 +11297,7 @@
               </a:defRPr>
             </a:lvl5pPr>
             <a:lvl6pPr>
+              <a:buNone/>
               <a:defRPr sz="2025" b="1">
                 <a:solidFill>
                   <a:srgbClr val="684A3A"/>
@@ -11077,6 +11308,7 @@
               </a:defRPr>
             </a:lvl6pPr>
             <a:lvl7pPr>
+              <a:buNone/>
               <a:defRPr sz="2025" b="1">
                 <a:solidFill>
                   <a:srgbClr val="684A3A"/>
@@ -11087,6 +11319,7 @@
               </a:defRPr>
             </a:lvl7pPr>
             <a:lvl8pPr>
+              <a:buNone/>
               <a:defRPr sz="2025" b="1">
                 <a:solidFill>
                   <a:srgbClr val="684A3A"/>
@@ -11097,6 +11330,7 @@
               </a:defRPr>
             </a:lvl8pPr>
             <a:lvl9pPr>
+              <a:buNone/>
               <a:defRPr sz="2025" b="1">
                 <a:solidFill>
                   <a:srgbClr val="684A3A"/>
@@ -11109,6 +11343,7 @@
           </a:lstStyle>
           <a:p xmlns:a="http://schemas.openxmlformats.org/drawingml/2006/main">
             <a:pPr>
+              <a:buNone/>
               <a:defRPr sz="2025" b="1">
                 <a:solidFill>
                   <a:srgbClr val="684A3A"/>
@@ -11173,6 +11408,7 @@
               </a:defRPr>
             </a:defPPr>
             <a:lvl1pPr>
+              <a:buNone/>
               <a:defRPr sz="1725" b="0">
                 <a:solidFill>
                   <a:srgbClr val="473229"/>
@@ -11183,6 +11419,7 @@
               </a:defRPr>
             </a:lvl1pPr>
             <a:lvl2pPr>
+              <a:buNone/>
               <a:defRPr sz="1725" b="0">
                 <a:solidFill>
                   <a:srgbClr val="473229"/>
@@ -11193,6 +11430,7 @@
               </a:defRPr>
             </a:lvl2pPr>
             <a:lvl3pPr>
+              <a:buNone/>
               <a:defRPr sz="1725" b="0">
                 <a:solidFill>
                   <a:srgbClr val="473229"/>
@@ -11203,6 +11441,7 @@
               </a:defRPr>
             </a:lvl3pPr>
             <a:lvl4pPr>
+              <a:buNone/>
               <a:defRPr sz="1725" b="0">
                 <a:solidFill>
                   <a:srgbClr val="473229"/>
@@ -11213,6 +11452,7 @@
               </a:defRPr>
             </a:lvl4pPr>
             <a:lvl5pPr>
+              <a:buNone/>
               <a:defRPr sz="1725" b="0">
                 <a:solidFill>
                   <a:srgbClr val="473229"/>
@@ -11223,6 +11463,7 @@
               </a:defRPr>
             </a:lvl5pPr>
             <a:lvl6pPr>
+              <a:buNone/>
               <a:defRPr sz="1725" b="0">
                 <a:solidFill>
                   <a:srgbClr val="473229"/>
@@ -11233,6 +11474,7 @@
               </a:defRPr>
             </a:lvl6pPr>
             <a:lvl7pPr>
+              <a:buNone/>
               <a:defRPr sz="1725" b="0">
                 <a:solidFill>
                   <a:srgbClr val="473229"/>
@@ -11243,6 +11485,7 @@
               </a:defRPr>
             </a:lvl7pPr>
             <a:lvl8pPr>
+              <a:buNone/>
               <a:defRPr sz="1725" b="0">
                 <a:solidFill>
                   <a:srgbClr val="473229"/>
@@ -11253,6 +11496,7 @@
               </a:defRPr>
             </a:lvl8pPr>
             <a:lvl9pPr>
+              <a:buNone/>
               <a:defRPr sz="1725" b="0">
                 <a:solidFill>
                   <a:srgbClr val="473229"/>
@@ -11265,6 +11509,7 @@
           </a:lstStyle>
           <a:p xmlns:a="http://schemas.openxmlformats.org/drawingml/2006/main">
             <a:pPr>
+              <a:buNone/>
               <a:defRPr sz="1725" b="0">
                 <a:solidFill>
                   <a:srgbClr val="473229"/>
@@ -11288,6 +11533,7 @@
           </a:p>
           <a:p xmlns:a="http://schemas.openxmlformats.org/drawingml/2006/main">
             <a:pPr>
+              <a:buNone/>
               <a:defRPr sz="1725" b="0">
                 <a:solidFill>
                   <a:srgbClr val="473229"/>
@@ -11382,6 +11628,7 @@
               </a:defRPr>
             </a:defPPr>
             <a:lvl1pPr>
+              <a:buNone/>
               <a:defRPr sz="2025" b="1">
                 <a:solidFill>
                   <a:srgbClr val="684A3A"/>
@@ -11392,6 +11639,7 @@
               </a:defRPr>
             </a:lvl1pPr>
             <a:lvl2pPr>
+              <a:buNone/>
               <a:defRPr sz="2025" b="1">
                 <a:solidFill>
                   <a:srgbClr val="684A3A"/>
@@ -11402,6 +11650,7 @@
               </a:defRPr>
             </a:lvl2pPr>
             <a:lvl3pPr>
+              <a:buNone/>
               <a:defRPr sz="2025" b="1">
                 <a:solidFill>
                   <a:srgbClr val="684A3A"/>
@@ -11412,6 +11661,7 @@
               </a:defRPr>
             </a:lvl3pPr>
             <a:lvl4pPr>
+              <a:buNone/>
               <a:defRPr sz="2025" b="1">
                 <a:solidFill>
                   <a:srgbClr val="684A3A"/>
@@ -11422,6 +11672,7 @@
               </a:defRPr>
             </a:lvl4pPr>
             <a:lvl5pPr>
+              <a:buNone/>
               <a:defRPr sz="2025" b="1">
                 <a:solidFill>
                   <a:srgbClr val="684A3A"/>
@@ -11432,6 +11683,7 @@
               </a:defRPr>
             </a:lvl5pPr>
             <a:lvl6pPr>
+              <a:buNone/>
               <a:defRPr sz="2025" b="1">
                 <a:solidFill>
                   <a:srgbClr val="684A3A"/>
@@ -11442,6 +11694,7 @@
               </a:defRPr>
             </a:lvl6pPr>
             <a:lvl7pPr>
+              <a:buNone/>
               <a:defRPr sz="2025" b="1">
                 <a:solidFill>
                   <a:srgbClr val="684A3A"/>
@@ -11452,6 +11705,7 @@
               </a:defRPr>
             </a:lvl7pPr>
             <a:lvl8pPr>
+              <a:buNone/>
               <a:defRPr sz="2025" b="1">
                 <a:solidFill>
                   <a:srgbClr val="684A3A"/>
@@ -11462,6 +11716,7 @@
               </a:defRPr>
             </a:lvl8pPr>
             <a:lvl9pPr>
+              <a:buNone/>
               <a:defRPr sz="2025" b="1">
                 <a:solidFill>
                   <a:srgbClr val="684A3A"/>
@@ -11474,6 +11729,7 @@
           </a:lstStyle>
           <a:p xmlns:a="http://schemas.openxmlformats.org/drawingml/2006/main">
             <a:pPr>
+              <a:buNone/>
               <a:defRPr sz="2025" b="1">
                 <a:solidFill>
                   <a:srgbClr val="684A3A"/>
@@ -11538,6 +11794,7 @@
               </a:defRPr>
             </a:defPPr>
             <a:lvl1pPr>
+              <a:buNone/>
               <a:defRPr sz="1875" b="0">
                 <a:solidFill>
                   <a:srgbClr val="684A3A"/>
@@ -11548,6 +11805,7 @@
               </a:defRPr>
             </a:lvl1pPr>
             <a:lvl2pPr>
+              <a:buNone/>
               <a:defRPr sz="1875" b="0">
                 <a:solidFill>
                   <a:srgbClr val="684A3A"/>
@@ -11558,6 +11816,7 @@
               </a:defRPr>
             </a:lvl2pPr>
             <a:lvl3pPr>
+              <a:buNone/>
               <a:defRPr sz="1875" b="0">
                 <a:solidFill>
                   <a:srgbClr val="684A3A"/>
@@ -11568,6 +11827,7 @@
               </a:defRPr>
             </a:lvl3pPr>
             <a:lvl4pPr>
+              <a:buNone/>
               <a:defRPr sz="1875" b="0">
                 <a:solidFill>
                   <a:srgbClr val="684A3A"/>
@@ -11578,6 +11838,7 @@
               </a:defRPr>
             </a:lvl4pPr>
             <a:lvl5pPr>
+              <a:buNone/>
               <a:defRPr sz="1875" b="0">
                 <a:solidFill>
                   <a:srgbClr val="684A3A"/>
@@ -11588,6 +11849,7 @@
               </a:defRPr>
             </a:lvl5pPr>
             <a:lvl6pPr>
+              <a:buNone/>
               <a:defRPr sz="1875" b="0">
                 <a:solidFill>
                   <a:srgbClr val="684A3A"/>
@@ -11598,6 +11860,7 @@
               </a:defRPr>
             </a:lvl6pPr>
             <a:lvl7pPr>
+              <a:buNone/>
               <a:defRPr sz="1875" b="0">
                 <a:solidFill>
                   <a:srgbClr val="684A3A"/>
@@ -11608,6 +11871,7 @@
               </a:defRPr>
             </a:lvl7pPr>
             <a:lvl8pPr>
+              <a:buNone/>
               <a:defRPr sz="1875" b="0">
                 <a:solidFill>
                   <a:srgbClr val="684A3A"/>
@@ -11618,6 +11882,7 @@
               </a:defRPr>
             </a:lvl8pPr>
             <a:lvl9pPr>
+              <a:buNone/>
               <a:defRPr sz="1875" b="0">
                 <a:solidFill>
                   <a:srgbClr val="684A3A"/>
@@ -11630,6 +11895,7 @@
           </a:lstStyle>
           <a:p xmlns:a="http://schemas.openxmlformats.org/drawingml/2006/main">
             <a:pPr>
+              <a:buNone/>
               <a:defRPr sz="1875" b="0">
                 <a:solidFill>
                   <a:srgbClr val="684A3A"/>
@@ -11648,7 +11914,7 @@
                 <a:ea typeface="Segoe UI"/>
                 <a:cs typeface="Segoe UI"/>
               </a:rPr>
-              <a:t>Exact quotations and source IDs are checked before a report is saved.</a:t>
+              <a:t>Query trace and exact document versions stay with the report.</a:t>
             </a:r>
           </a:p>
         </p:txBody>
@@ -12251,6 +12517,7 @@
               </a:defRPr>
             </a:defPPr>
             <a:lvl1pPr>
+              <a:buNone/>
               <a:defRPr sz="2250" b="1">
                 <a:solidFill>
                   <a:srgbClr val="684A3A"/>
@@ -12261,6 +12528,7 @@
               </a:defRPr>
             </a:lvl1pPr>
             <a:lvl2pPr>
+              <a:buNone/>
               <a:defRPr sz="2250" b="1">
                 <a:solidFill>
                   <a:srgbClr val="684A3A"/>
@@ -12271,6 +12539,7 @@
               </a:defRPr>
             </a:lvl2pPr>
             <a:lvl3pPr>
+              <a:buNone/>
               <a:defRPr sz="2250" b="1">
                 <a:solidFill>
                   <a:srgbClr val="684A3A"/>
@@ -12281,6 +12550,7 @@
               </a:defRPr>
             </a:lvl3pPr>
             <a:lvl4pPr>
+              <a:buNone/>
               <a:defRPr sz="2250" b="1">
                 <a:solidFill>
                   <a:srgbClr val="684A3A"/>
@@ -12291,6 +12561,7 @@
               </a:defRPr>
             </a:lvl4pPr>
             <a:lvl5pPr>
+              <a:buNone/>
               <a:defRPr sz="2250" b="1">
                 <a:solidFill>
                   <a:srgbClr val="684A3A"/>
@@ -12301,6 +12572,7 @@
               </a:defRPr>
             </a:lvl5pPr>
             <a:lvl6pPr>
+              <a:buNone/>
               <a:defRPr sz="2250" b="1">
                 <a:solidFill>
                   <a:srgbClr val="684A3A"/>
@@ -12311,6 +12583,7 @@
               </a:defRPr>
             </a:lvl6pPr>
             <a:lvl7pPr>
+              <a:buNone/>
               <a:defRPr sz="2250" b="1">
                 <a:solidFill>
                   <a:srgbClr val="684A3A"/>
@@ -12321,6 +12594,7 @@
               </a:defRPr>
             </a:lvl7pPr>
             <a:lvl8pPr>
+              <a:buNone/>
               <a:defRPr sz="2250" b="1">
                 <a:solidFill>
                   <a:srgbClr val="684A3A"/>
@@ -12331,6 +12605,7 @@
               </a:defRPr>
             </a:lvl8pPr>
             <a:lvl9pPr>
+              <a:buNone/>
               <a:defRPr sz="2250" b="1">
                 <a:solidFill>
                   <a:srgbClr val="684A3A"/>
@@ -12343,6 +12618,7 @@
           </a:lstStyle>
           <a:p xmlns:a="http://schemas.openxmlformats.org/drawingml/2006/main">
             <a:pPr>
+              <a:buNone/>
               <a:defRPr sz="2250" b="1">
                 <a:solidFill>
                   <a:srgbClr val="684A3A"/>
@@ -12407,6 +12683,7 @@
               </a:defRPr>
             </a:defPPr>
             <a:lvl1pPr>
+              <a:buNone/>
               <a:defRPr sz="1950" b="0">
                 <a:solidFill>
                   <a:srgbClr val="473229"/>
@@ -12417,6 +12694,7 @@
               </a:defRPr>
             </a:lvl1pPr>
             <a:lvl2pPr>
+              <a:buNone/>
               <a:defRPr sz="1950" b="0">
                 <a:solidFill>
                   <a:srgbClr val="473229"/>
@@ -12427,6 +12705,7 @@
               </a:defRPr>
             </a:lvl2pPr>
             <a:lvl3pPr>
+              <a:buNone/>
               <a:defRPr sz="1950" b="0">
                 <a:solidFill>
                   <a:srgbClr val="473229"/>
@@ -12437,6 +12716,7 @@
               </a:defRPr>
             </a:lvl3pPr>
             <a:lvl4pPr>
+              <a:buNone/>
               <a:defRPr sz="1950" b="0">
                 <a:solidFill>
                   <a:srgbClr val="473229"/>
@@ -12447,6 +12727,7 @@
               </a:defRPr>
             </a:lvl4pPr>
             <a:lvl5pPr>
+              <a:buNone/>
               <a:defRPr sz="1950" b="0">
                 <a:solidFill>
                   <a:srgbClr val="473229"/>
@@ -12457,6 +12738,7 @@
               </a:defRPr>
             </a:lvl5pPr>
             <a:lvl6pPr>
+              <a:buNone/>
               <a:defRPr sz="1950" b="0">
                 <a:solidFill>
                   <a:srgbClr val="473229"/>
@@ -12467,6 +12749,7 @@
               </a:defRPr>
             </a:lvl6pPr>
             <a:lvl7pPr>
+              <a:buNone/>
               <a:defRPr sz="1950" b="0">
                 <a:solidFill>
                   <a:srgbClr val="473229"/>
@@ -12477,6 +12760,7 @@
               </a:defRPr>
             </a:lvl7pPr>
             <a:lvl8pPr>
+              <a:buNone/>
               <a:defRPr sz="1950" b="0">
                 <a:solidFill>
                   <a:srgbClr val="473229"/>
@@ -12487,6 +12771,7 @@
               </a:defRPr>
             </a:lvl8pPr>
             <a:lvl9pPr>
+              <a:buNone/>
               <a:defRPr sz="1950" b="0">
                 <a:solidFill>
                   <a:srgbClr val="473229"/>
@@ -12499,6 +12784,7 @@
           </a:lstStyle>
           <a:p xmlns:a="http://schemas.openxmlformats.org/drawingml/2006/main">
             <a:pPr>
+              <a:buNone/>
               <a:defRPr sz="1950" b="0">
                 <a:solidFill>
                   <a:srgbClr val="473229"/>
@@ -12517,7 +12803,7 @@
                 <a:ea typeface="Segoe UI"/>
                 <a:cs typeface="Segoe UI"/>
               </a:rPr>
-              <a:t>Two fictional CSV sources, a joined view and a SELECT-only REST account.</a:t>
+              <a:t>Joins profile and CV sources. Fresh SELECT before analysis, with a visible query and document trace.</a:t>
             </a:r>
           </a:p>
         </p:txBody>
@@ -12593,6 +12879,7 @@
               </a:defRPr>
             </a:defPPr>
             <a:lvl1pPr>
+              <a:buNone/>
               <a:defRPr sz="2250" b="1">
                 <a:solidFill>
                   <a:srgbClr val="684A3A"/>
@@ -12603,6 +12890,7 @@
               </a:defRPr>
             </a:lvl1pPr>
             <a:lvl2pPr>
+              <a:buNone/>
               <a:defRPr sz="2250" b="1">
                 <a:solidFill>
                   <a:srgbClr val="684A3A"/>
@@ -12613,6 +12901,7 @@
               </a:defRPr>
             </a:lvl2pPr>
             <a:lvl3pPr>
+              <a:buNone/>
               <a:defRPr sz="2250" b="1">
                 <a:solidFill>
                   <a:srgbClr val="684A3A"/>
@@ -12623,6 +12912,7 @@
               </a:defRPr>
             </a:lvl3pPr>
             <a:lvl4pPr>
+              <a:buNone/>
               <a:defRPr sz="2250" b="1">
                 <a:solidFill>
                   <a:srgbClr val="684A3A"/>
@@ -12633,6 +12923,7 @@
               </a:defRPr>
             </a:lvl4pPr>
             <a:lvl5pPr>
+              <a:buNone/>
               <a:defRPr sz="2250" b="1">
                 <a:solidFill>
                   <a:srgbClr val="684A3A"/>
@@ -12643,6 +12934,7 @@
               </a:defRPr>
             </a:lvl5pPr>
             <a:lvl6pPr>
+              <a:buNone/>
               <a:defRPr sz="2250" b="1">
                 <a:solidFill>
                   <a:srgbClr val="684A3A"/>
@@ -12653,6 +12945,7 @@
               </a:defRPr>
             </a:lvl6pPr>
             <a:lvl7pPr>
+              <a:buNone/>
               <a:defRPr sz="2250" b="1">
                 <a:solidFill>
                   <a:srgbClr val="684A3A"/>
@@ -12663,6 +12956,7 @@
               </a:defRPr>
             </a:lvl7pPr>
             <a:lvl8pPr>
+              <a:buNone/>
               <a:defRPr sz="2250" b="1">
                 <a:solidFill>
                   <a:srgbClr val="684A3A"/>
@@ -12673,6 +12967,7 @@
               </a:defRPr>
             </a:lvl8pPr>
             <a:lvl9pPr>
+              <a:buNone/>
               <a:defRPr sz="2250" b="1">
                 <a:solidFill>
                   <a:srgbClr val="684A3A"/>
@@ -12685,6 +12980,7 @@
           </a:lstStyle>
           <a:p xmlns:a="http://schemas.openxmlformats.org/drawingml/2006/main">
             <a:pPr>
+              <a:buNone/>
               <a:defRPr sz="2250" b="1">
                 <a:solidFill>
                   <a:srgbClr val="684A3A"/>
@@ -12749,6 +13045,7 @@
               </a:defRPr>
             </a:defPPr>
             <a:lvl1pPr>
+              <a:buNone/>
               <a:defRPr sz="1950" b="0">
                 <a:solidFill>
                   <a:srgbClr val="473229"/>
@@ -12759,6 +13056,7 @@
               </a:defRPr>
             </a:lvl1pPr>
             <a:lvl2pPr>
+              <a:buNone/>
               <a:defRPr sz="1950" b="0">
                 <a:solidFill>
                   <a:srgbClr val="473229"/>
@@ -12769,6 +13067,7 @@
               </a:defRPr>
             </a:lvl2pPr>
             <a:lvl3pPr>
+              <a:buNone/>
               <a:defRPr sz="1950" b="0">
                 <a:solidFill>
                   <a:srgbClr val="473229"/>
@@ -12779,6 +13078,7 @@
               </a:defRPr>
             </a:lvl3pPr>
             <a:lvl4pPr>
+              <a:buNone/>
               <a:defRPr sz="1950" b="0">
                 <a:solidFill>
                   <a:srgbClr val="473229"/>
@@ -12789,6 +13089,7 @@
               </a:defRPr>
             </a:lvl4pPr>
             <a:lvl5pPr>
+              <a:buNone/>
               <a:defRPr sz="1950" b="0">
                 <a:solidFill>
                   <a:srgbClr val="473229"/>
@@ -12799,6 +13100,7 @@
               </a:defRPr>
             </a:lvl5pPr>
             <a:lvl6pPr>
+              <a:buNone/>
               <a:defRPr sz="1950" b="0">
                 <a:solidFill>
                   <a:srgbClr val="473229"/>
@@ -12809,6 +13111,7 @@
               </a:defRPr>
             </a:lvl6pPr>
             <a:lvl7pPr>
+              <a:buNone/>
               <a:defRPr sz="1950" b="0">
                 <a:solidFill>
                   <a:srgbClr val="473229"/>
@@ -12819,6 +13122,7 @@
               </a:defRPr>
             </a:lvl7pPr>
             <a:lvl8pPr>
+              <a:buNone/>
               <a:defRPr sz="1950" b="0">
                 <a:solidFill>
                   <a:srgbClr val="473229"/>
@@ -12829,6 +13133,7 @@
               </a:defRPr>
             </a:lvl8pPr>
             <a:lvl9pPr>
+              <a:buNone/>
               <a:defRPr sz="1950" b="0">
                 <a:solidFill>
                   <a:srgbClr val="473229"/>
@@ -12841,6 +13146,7 @@
           </a:lstStyle>
           <a:p xmlns:a="http://schemas.openxmlformats.org/drawingml/2006/main">
             <a:pPr>
+              <a:buNone/>
               <a:defRPr sz="1950" b="0">
                 <a:solidFill>
                   <a:srgbClr val="473229"/>
@@ -12935,6 +13241,7 @@
               </a:defRPr>
             </a:defPPr>
             <a:lvl1pPr>
+              <a:buNone/>
               <a:defRPr sz="2250" b="1">
                 <a:solidFill>
                   <a:srgbClr val="684A3A"/>
@@ -12945,6 +13252,7 @@
               </a:defRPr>
             </a:lvl1pPr>
             <a:lvl2pPr>
+              <a:buNone/>
               <a:defRPr sz="2250" b="1">
                 <a:solidFill>
                   <a:srgbClr val="684A3A"/>
@@ -12955,6 +13263,7 @@
               </a:defRPr>
             </a:lvl2pPr>
             <a:lvl3pPr>
+              <a:buNone/>
               <a:defRPr sz="2250" b="1">
                 <a:solidFill>
                   <a:srgbClr val="684A3A"/>
@@ -12965,6 +13274,7 @@
               </a:defRPr>
             </a:lvl3pPr>
             <a:lvl4pPr>
+              <a:buNone/>
               <a:defRPr sz="2250" b="1">
                 <a:solidFill>
                   <a:srgbClr val="684A3A"/>
@@ -12975,6 +13285,7 @@
               </a:defRPr>
             </a:lvl4pPr>
             <a:lvl5pPr>
+              <a:buNone/>
               <a:defRPr sz="2250" b="1">
                 <a:solidFill>
                   <a:srgbClr val="684A3A"/>
@@ -12985,6 +13296,7 @@
               </a:defRPr>
             </a:lvl5pPr>
             <a:lvl6pPr>
+              <a:buNone/>
               <a:defRPr sz="2250" b="1">
                 <a:solidFill>
                   <a:srgbClr val="684A3A"/>
@@ -12995,6 +13307,7 @@
               </a:defRPr>
             </a:lvl6pPr>
             <a:lvl7pPr>
+              <a:buNone/>
               <a:defRPr sz="2250" b="1">
                 <a:solidFill>
                   <a:srgbClr val="684A3A"/>
@@ -13005,6 +13318,7 @@
               </a:defRPr>
             </a:lvl7pPr>
             <a:lvl8pPr>
+              <a:buNone/>
               <a:defRPr sz="2250" b="1">
                 <a:solidFill>
                   <a:srgbClr val="684A3A"/>
@@ -13015,6 +13329,7 @@
               </a:defRPr>
             </a:lvl8pPr>
             <a:lvl9pPr>
+              <a:buNone/>
               <a:defRPr sz="2250" b="1">
                 <a:solidFill>
                   <a:srgbClr val="684A3A"/>
@@ -13027,6 +13342,7 @@
           </a:lstStyle>
           <a:p xmlns:a="http://schemas.openxmlformats.org/drawingml/2006/main">
             <a:pPr>
+              <a:buNone/>
               <a:defRPr sz="2250" b="1">
                 <a:solidFill>
                   <a:srgbClr val="684A3A"/>
@@ -13091,6 +13407,7 @@
               </a:defRPr>
             </a:defPPr>
             <a:lvl1pPr>
+              <a:buNone/>
               <a:defRPr sz="1950" b="0">
                 <a:solidFill>
                   <a:srgbClr val="473229"/>
@@ -13101,6 +13418,7 @@
               </a:defRPr>
             </a:lvl1pPr>
             <a:lvl2pPr>
+              <a:buNone/>
               <a:defRPr sz="1950" b="0">
                 <a:solidFill>
                   <a:srgbClr val="473229"/>
@@ -13111,6 +13429,7 @@
               </a:defRPr>
             </a:lvl2pPr>
             <a:lvl3pPr>
+              <a:buNone/>
               <a:defRPr sz="1950" b="0">
                 <a:solidFill>
                   <a:srgbClr val="473229"/>
@@ -13121,6 +13440,7 @@
               </a:defRPr>
             </a:lvl3pPr>
             <a:lvl4pPr>
+              <a:buNone/>
               <a:defRPr sz="1950" b="0">
                 <a:solidFill>
                   <a:srgbClr val="473229"/>
@@ -13131,6 +13451,7 @@
               </a:defRPr>
             </a:lvl4pPr>
             <a:lvl5pPr>
+              <a:buNone/>
               <a:defRPr sz="1950" b="0">
                 <a:solidFill>
                   <a:srgbClr val="473229"/>
@@ -13141,6 +13462,7 @@
               </a:defRPr>
             </a:lvl5pPr>
             <a:lvl6pPr>
+              <a:buNone/>
               <a:defRPr sz="1950" b="0">
                 <a:solidFill>
                   <a:srgbClr val="473229"/>
@@ -13151,6 +13473,7 @@
               </a:defRPr>
             </a:lvl6pPr>
             <a:lvl7pPr>
+              <a:buNone/>
               <a:defRPr sz="1950" b="0">
                 <a:solidFill>
                   <a:srgbClr val="473229"/>
@@ -13161,6 +13484,7 @@
               </a:defRPr>
             </a:lvl7pPr>
             <a:lvl8pPr>
+              <a:buNone/>
               <a:defRPr sz="1950" b="0">
                 <a:solidFill>
                   <a:srgbClr val="473229"/>
@@ -13171,6 +13495,7 @@
               </a:defRPr>
             </a:lvl8pPr>
             <a:lvl9pPr>
+              <a:buNone/>
               <a:defRPr sz="1950" b="0">
                 <a:solidFill>
                   <a:srgbClr val="473229"/>
@@ -13183,6 +13508,7 @@
           </a:lstStyle>
           <a:p xmlns:a="http://schemas.openxmlformats.org/drawingml/2006/main">
             <a:pPr>
+              <a:buNone/>
               <a:defRPr sz="1950" b="0">
                 <a:solidFill>
                   <a:srgbClr val="473229"/>
@@ -13277,6 +13603,7 @@
               </a:defRPr>
             </a:defPPr>
             <a:lvl1pPr>
+              <a:buNone/>
               <a:defRPr sz="2250" b="1">
                 <a:solidFill>
                   <a:srgbClr val="684A3A"/>
@@ -13287,6 +13614,7 @@
               </a:defRPr>
             </a:lvl1pPr>
             <a:lvl2pPr>
+              <a:buNone/>
               <a:defRPr sz="2250" b="1">
                 <a:solidFill>
                   <a:srgbClr val="684A3A"/>
@@ -13297,6 +13625,7 @@
               </a:defRPr>
             </a:lvl2pPr>
             <a:lvl3pPr>
+              <a:buNone/>
               <a:defRPr sz="2250" b="1">
                 <a:solidFill>
                   <a:srgbClr val="684A3A"/>
@@ -13307,6 +13636,7 @@
               </a:defRPr>
             </a:lvl3pPr>
             <a:lvl4pPr>
+              <a:buNone/>
               <a:defRPr sz="2250" b="1">
                 <a:solidFill>
                   <a:srgbClr val="684A3A"/>
@@ -13317,6 +13647,7 @@
               </a:defRPr>
             </a:lvl4pPr>
             <a:lvl5pPr>
+              <a:buNone/>
               <a:defRPr sz="2250" b="1">
                 <a:solidFill>
                   <a:srgbClr val="684A3A"/>
@@ -13327,6 +13658,7 @@
               </a:defRPr>
             </a:lvl5pPr>
             <a:lvl6pPr>
+              <a:buNone/>
               <a:defRPr sz="2250" b="1">
                 <a:solidFill>
                   <a:srgbClr val="684A3A"/>
@@ -13337,6 +13669,7 @@
               </a:defRPr>
             </a:lvl6pPr>
             <a:lvl7pPr>
+              <a:buNone/>
               <a:defRPr sz="2250" b="1">
                 <a:solidFill>
                   <a:srgbClr val="684A3A"/>
@@ -13347,6 +13680,7 @@
               </a:defRPr>
             </a:lvl7pPr>
             <a:lvl8pPr>
+              <a:buNone/>
               <a:defRPr sz="2250" b="1">
                 <a:solidFill>
                   <a:srgbClr val="684A3A"/>
@@ -13357,6 +13691,7 @@
               </a:defRPr>
             </a:lvl8pPr>
             <a:lvl9pPr>
+              <a:buNone/>
               <a:defRPr sz="2250" b="1">
                 <a:solidFill>
                   <a:srgbClr val="684A3A"/>
@@ -13369,6 +13704,7 @@
           </a:lstStyle>
           <a:p xmlns:a="http://schemas.openxmlformats.org/drawingml/2006/main">
             <a:pPr>
+              <a:buNone/>
               <a:defRPr sz="2250" b="1">
                 <a:solidFill>
                   <a:srgbClr val="684A3A"/>
@@ -13433,6 +13769,7 @@
               </a:defRPr>
             </a:defPPr>
             <a:lvl1pPr>
+              <a:buNone/>
               <a:defRPr sz="1950" b="0">
                 <a:solidFill>
                   <a:srgbClr val="473229"/>
@@ -13443,6 +13780,7 @@
               </a:defRPr>
             </a:lvl1pPr>
             <a:lvl2pPr>
+              <a:buNone/>
               <a:defRPr sz="1950" b="0">
                 <a:solidFill>
                   <a:srgbClr val="473229"/>
@@ -13453,6 +13791,7 @@
               </a:defRPr>
             </a:lvl2pPr>
             <a:lvl3pPr>
+              <a:buNone/>
               <a:defRPr sz="1950" b="0">
                 <a:solidFill>
                   <a:srgbClr val="473229"/>
@@ -13463,6 +13802,7 @@
               </a:defRPr>
             </a:lvl3pPr>
             <a:lvl4pPr>
+              <a:buNone/>
               <a:defRPr sz="1950" b="0">
                 <a:solidFill>
                   <a:srgbClr val="473229"/>
@@ -13473,6 +13813,7 @@
               </a:defRPr>
             </a:lvl4pPr>
             <a:lvl5pPr>
+              <a:buNone/>
               <a:defRPr sz="1950" b="0">
                 <a:solidFill>
                   <a:srgbClr val="473229"/>
@@ -13483,6 +13824,7 @@
               </a:defRPr>
             </a:lvl5pPr>
             <a:lvl6pPr>
+              <a:buNone/>
               <a:defRPr sz="1950" b="0">
                 <a:solidFill>
                   <a:srgbClr val="473229"/>
@@ -13493,6 +13835,7 @@
               </a:defRPr>
             </a:lvl6pPr>
             <a:lvl7pPr>
+              <a:buNone/>
               <a:defRPr sz="1950" b="0">
                 <a:solidFill>
                   <a:srgbClr val="473229"/>
@@ -13503,6 +13846,7 @@
               </a:defRPr>
             </a:lvl7pPr>
             <a:lvl8pPr>
+              <a:buNone/>
               <a:defRPr sz="1950" b="0">
                 <a:solidFill>
                   <a:srgbClr val="473229"/>
@@ -13513,6 +13857,7 @@
               </a:defRPr>
             </a:lvl8pPr>
             <a:lvl9pPr>
+              <a:buNone/>
               <a:defRPr sz="1950" b="0">
                 <a:solidFill>
                   <a:srgbClr val="473229"/>
@@ -13525,6 +13870,7 @@
           </a:lstStyle>
           <a:p xmlns:a="http://schemas.openxmlformats.org/drawingml/2006/main">
             <a:pPr>
+              <a:buNone/>
               <a:defRPr sz="1950" b="0">
                 <a:solidFill>
                   <a:srgbClr val="473229"/>
@@ -14206,6 +14552,7 @@
               </a:defRPr>
             </a:defPPr>
             <a:lvl1pPr>
+              <a:buNone/>
               <a:defRPr sz="2325" b="1">
                 <a:solidFill>
                   <a:srgbClr val="684A3A"/>
@@ -14216,6 +14563,7 @@
               </a:defRPr>
             </a:lvl1pPr>
             <a:lvl2pPr>
+              <a:buNone/>
               <a:defRPr sz="2325" b="1">
                 <a:solidFill>
                   <a:srgbClr val="684A3A"/>
@@ -14226,6 +14574,7 @@
               </a:defRPr>
             </a:lvl2pPr>
             <a:lvl3pPr>
+              <a:buNone/>
               <a:defRPr sz="2325" b="1">
                 <a:solidFill>
                   <a:srgbClr val="684A3A"/>
@@ -14236,6 +14585,7 @@
               </a:defRPr>
             </a:lvl3pPr>
             <a:lvl4pPr>
+              <a:buNone/>
               <a:defRPr sz="2325" b="1">
                 <a:solidFill>
                   <a:srgbClr val="684A3A"/>
@@ -14246,6 +14596,7 @@
               </a:defRPr>
             </a:lvl4pPr>
             <a:lvl5pPr>
+              <a:buNone/>
               <a:defRPr sz="2325" b="1">
                 <a:solidFill>
                   <a:srgbClr val="684A3A"/>
@@ -14256,6 +14607,7 @@
               </a:defRPr>
             </a:lvl5pPr>
             <a:lvl6pPr>
+              <a:buNone/>
               <a:defRPr sz="2325" b="1">
                 <a:solidFill>
                   <a:srgbClr val="684A3A"/>
@@ -14266,6 +14618,7 @@
               </a:defRPr>
             </a:lvl6pPr>
             <a:lvl7pPr>
+              <a:buNone/>
               <a:defRPr sz="2325" b="1">
                 <a:solidFill>
                   <a:srgbClr val="684A3A"/>
@@ -14276,6 +14629,7 @@
               </a:defRPr>
             </a:lvl7pPr>
             <a:lvl8pPr>
+              <a:buNone/>
               <a:defRPr sz="2325" b="1">
                 <a:solidFill>
                   <a:srgbClr val="684A3A"/>
@@ -14286,6 +14640,7 @@
               </a:defRPr>
             </a:lvl8pPr>
             <a:lvl9pPr>
+              <a:buNone/>
               <a:defRPr sz="2325" b="1">
                 <a:solidFill>
                   <a:srgbClr val="684A3A"/>
@@ -14298,6 +14653,7 @@
           </a:lstStyle>
           <a:p xmlns:a="http://schemas.openxmlformats.org/drawingml/2006/main">
             <a:pPr>
+              <a:buNone/>
               <a:defRPr sz="2325" b="1">
                 <a:solidFill>
                   <a:srgbClr val="684A3A"/>
@@ -14362,6 +14718,7 @@
               </a:defRPr>
             </a:defPPr>
             <a:lvl1pPr>
+              <a:buNone/>
               <a:defRPr sz="2250" b="0">
                 <a:solidFill>
                   <a:srgbClr val="473229"/>
@@ -14372,6 +14729,7 @@
               </a:defRPr>
             </a:lvl1pPr>
             <a:lvl2pPr>
+              <a:buNone/>
               <a:defRPr sz="2250" b="0">
                 <a:solidFill>
                   <a:srgbClr val="473229"/>
@@ -14382,6 +14740,7 @@
               </a:defRPr>
             </a:lvl2pPr>
             <a:lvl3pPr>
+              <a:buNone/>
               <a:defRPr sz="2250" b="0">
                 <a:solidFill>
                   <a:srgbClr val="473229"/>
@@ -14392,6 +14751,7 @@
               </a:defRPr>
             </a:lvl3pPr>
             <a:lvl4pPr>
+              <a:buNone/>
               <a:defRPr sz="2250" b="0">
                 <a:solidFill>
                   <a:srgbClr val="473229"/>
@@ -14402,6 +14762,7 @@
               </a:defRPr>
             </a:lvl4pPr>
             <a:lvl5pPr>
+              <a:buNone/>
               <a:defRPr sz="2250" b="0">
                 <a:solidFill>
                   <a:srgbClr val="473229"/>
@@ -14412,6 +14773,7 @@
               </a:defRPr>
             </a:lvl5pPr>
             <a:lvl6pPr>
+              <a:buNone/>
               <a:defRPr sz="2250" b="0">
                 <a:solidFill>
                   <a:srgbClr val="473229"/>
@@ -14422,6 +14784,7 @@
               </a:defRPr>
             </a:lvl6pPr>
             <a:lvl7pPr>
+              <a:buNone/>
               <a:defRPr sz="2250" b="0">
                 <a:solidFill>
                   <a:srgbClr val="473229"/>
@@ -14432,6 +14795,7 @@
               </a:defRPr>
             </a:lvl7pPr>
             <a:lvl8pPr>
+              <a:buNone/>
               <a:defRPr sz="2250" b="0">
                 <a:solidFill>
                   <a:srgbClr val="473229"/>
@@ -14442,6 +14806,7 @@
               </a:defRPr>
             </a:lvl8pPr>
             <a:lvl9pPr>
+              <a:buNone/>
               <a:defRPr sz="2250" b="0">
                 <a:solidFill>
                   <a:srgbClr val="473229"/>
@@ -14454,6 +14819,7 @@
           </a:lstStyle>
           <a:p xmlns:a="http://schemas.openxmlformats.org/drawingml/2006/main">
             <a:pPr>
+              <a:buNone/>
               <a:defRPr sz="2250" b="0">
                 <a:solidFill>
                   <a:srgbClr val="473229"/>
@@ -14518,6 +14884,7 @@
               </a:defRPr>
             </a:defPPr>
             <a:lvl1pPr>
+              <a:buNone/>
               <a:defRPr sz="1800" b="0">
                 <a:solidFill>
                   <a:srgbClr val="806E60"/>
@@ -14528,6 +14895,7 @@
               </a:defRPr>
             </a:lvl1pPr>
             <a:lvl2pPr>
+              <a:buNone/>
               <a:defRPr sz="1800" b="0">
                 <a:solidFill>
                   <a:srgbClr val="806E60"/>
@@ -14538,6 +14906,7 @@
               </a:defRPr>
             </a:lvl2pPr>
             <a:lvl3pPr>
+              <a:buNone/>
               <a:defRPr sz="1800" b="0">
                 <a:solidFill>
                   <a:srgbClr val="806E60"/>
@@ -14548,6 +14917,7 @@
               </a:defRPr>
             </a:lvl3pPr>
             <a:lvl4pPr>
+              <a:buNone/>
               <a:defRPr sz="1800" b="0">
                 <a:solidFill>
                   <a:srgbClr val="806E60"/>
@@ -14558,6 +14928,7 @@
               </a:defRPr>
             </a:lvl4pPr>
             <a:lvl5pPr>
+              <a:buNone/>
               <a:defRPr sz="1800" b="0">
                 <a:solidFill>
                   <a:srgbClr val="806E60"/>
@@ -14568,6 +14939,7 @@
               </a:defRPr>
             </a:lvl5pPr>
             <a:lvl6pPr>
+              <a:buNone/>
               <a:defRPr sz="1800" b="0">
                 <a:solidFill>
                   <a:srgbClr val="806E60"/>
@@ -14578,6 +14950,7 @@
               </a:defRPr>
             </a:lvl6pPr>
             <a:lvl7pPr>
+              <a:buNone/>
               <a:defRPr sz="1800" b="0">
                 <a:solidFill>
                   <a:srgbClr val="806E60"/>
@@ -14588,6 +14961,7 @@
               </a:defRPr>
             </a:lvl7pPr>
             <a:lvl8pPr>
+              <a:buNone/>
               <a:defRPr sz="1800" b="0">
                 <a:solidFill>
                   <a:srgbClr val="806E60"/>
@@ -14598,6 +14972,7 @@
               </a:defRPr>
             </a:lvl8pPr>
             <a:lvl9pPr>
+              <a:buNone/>
               <a:defRPr sz="1800" b="0">
                 <a:solidFill>
                   <a:srgbClr val="806E60"/>
@@ -14610,6 +14985,7 @@
           </a:lstStyle>
           <a:p xmlns:a="http://schemas.openxmlformats.org/drawingml/2006/main">
             <a:pPr>
+              <a:buNone/>
               <a:defRPr sz="1800" b="0">
                 <a:solidFill>
                   <a:srgbClr val="806E60"/>
@@ -14674,6 +15050,7 @@
               </a:defRPr>
             </a:defPPr>
             <a:lvl1pPr>
+              <a:buNone/>
               <a:defRPr sz="2175" b="1">
                 <a:solidFill>
                   <a:srgbClr val="684A3A"/>
@@ -14684,6 +15061,7 @@
               </a:defRPr>
             </a:lvl1pPr>
             <a:lvl2pPr>
+              <a:buNone/>
               <a:defRPr sz="2175" b="1">
                 <a:solidFill>
                   <a:srgbClr val="684A3A"/>
@@ -14694,6 +15072,7 @@
               </a:defRPr>
             </a:lvl2pPr>
             <a:lvl3pPr>
+              <a:buNone/>
               <a:defRPr sz="2175" b="1">
                 <a:solidFill>
                   <a:srgbClr val="684A3A"/>
@@ -14704,6 +15083,7 @@
               </a:defRPr>
             </a:lvl3pPr>
             <a:lvl4pPr>
+              <a:buNone/>
               <a:defRPr sz="2175" b="1">
                 <a:solidFill>
                   <a:srgbClr val="684A3A"/>
@@ -14714,6 +15094,7 @@
               </a:defRPr>
             </a:lvl4pPr>
             <a:lvl5pPr>
+              <a:buNone/>
               <a:defRPr sz="2175" b="1">
                 <a:solidFill>
                   <a:srgbClr val="684A3A"/>
@@ -14724,6 +15105,7 @@
               </a:defRPr>
             </a:lvl5pPr>
             <a:lvl6pPr>
+              <a:buNone/>
               <a:defRPr sz="2175" b="1">
                 <a:solidFill>
                   <a:srgbClr val="684A3A"/>
@@ -14734,6 +15116,7 @@
               </a:defRPr>
             </a:lvl6pPr>
             <a:lvl7pPr>
+              <a:buNone/>
               <a:defRPr sz="2175" b="1">
                 <a:solidFill>
                   <a:srgbClr val="684A3A"/>
@@ -14744,6 +15127,7 @@
               </a:defRPr>
             </a:lvl7pPr>
             <a:lvl8pPr>
+              <a:buNone/>
               <a:defRPr sz="2175" b="1">
                 <a:solidFill>
                   <a:srgbClr val="684A3A"/>
@@ -14754,6 +15138,7 @@
               </a:defRPr>
             </a:lvl8pPr>
             <a:lvl9pPr>
+              <a:buNone/>
               <a:defRPr sz="2175" b="1">
                 <a:solidFill>
                   <a:srgbClr val="684A3A"/>
@@ -14766,6 +15151,7 @@
           </a:lstStyle>
           <a:p xmlns:a="http://schemas.openxmlformats.org/drawingml/2006/main">
             <a:pPr>
+              <a:buNone/>
               <a:defRPr sz="2175" b="1">
                 <a:solidFill>
                   <a:srgbClr val="684A3A"/>
@@ -14830,6 +15216,7 @@
               </a:defRPr>
             </a:defPPr>
             <a:lvl1pPr>
+              <a:buNone/>
               <a:defRPr sz="2175" b="0">
                 <a:solidFill>
                   <a:srgbClr val="473229"/>
@@ -14840,6 +15227,7 @@
               </a:defRPr>
             </a:lvl1pPr>
             <a:lvl2pPr>
+              <a:buNone/>
               <a:defRPr sz="2175" b="0">
                 <a:solidFill>
                   <a:srgbClr val="473229"/>
@@ -14850,6 +15238,7 @@
               </a:defRPr>
             </a:lvl2pPr>
             <a:lvl3pPr>
+              <a:buNone/>
               <a:defRPr sz="2175" b="0">
                 <a:solidFill>
                   <a:srgbClr val="473229"/>
@@ -14860,6 +15249,7 @@
               </a:defRPr>
             </a:lvl3pPr>
             <a:lvl4pPr>
+              <a:buNone/>
               <a:defRPr sz="2175" b="0">
                 <a:solidFill>
                   <a:srgbClr val="473229"/>
@@ -14870,6 +15260,7 @@
               </a:defRPr>
             </a:lvl4pPr>
             <a:lvl5pPr>
+              <a:buNone/>
               <a:defRPr sz="2175" b="0">
                 <a:solidFill>
                   <a:srgbClr val="473229"/>
@@ -14880,6 +15271,7 @@
               </a:defRPr>
             </a:lvl5pPr>
             <a:lvl6pPr>
+              <a:buNone/>
               <a:defRPr sz="2175" b="0">
                 <a:solidFill>
                   <a:srgbClr val="473229"/>
@@ -14890,6 +15282,7 @@
               </a:defRPr>
             </a:lvl6pPr>
             <a:lvl7pPr>
+              <a:buNone/>
               <a:defRPr sz="2175" b="0">
                 <a:solidFill>
                   <a:srgbClr val="473229"/>
@@ -14900,6 +15293,7 @@
               </a:defRPr>
             </a:lvl7pPr>
             <a:lvl8pPr>
+              <a:buNone/>
               <a:defRPr sz="2175" b="0">
                 <a:solidFill>
                   <a:srgbClr val="473229"/>
@@ -14910,6 +15304,7 @@
               </a:defRPr>
             </a:lvl8pPr>
             <a:lvl9pPr>
+              <a:buNone/>
               <a:defRPr sz="2175" b="0">
                 <a:solidFill>
                   <a:srgbClr val="473229"/>
@@ -14922,6 +15317,7 @@
           </a:lstStyle>
           <a:p xmlns:a="http://schemas.openxmlformats.org/drawingml/2006/main">
             <a:pPr>
+              <a:buNone/>
               <a:defRPr sz="2175" b="0">
                 <a:solidFill>
                   <a:srgbClr val="473229"/>
@@ -14986,6 +15382,7 @@
               </a:defRPr>
             </a:defPPr>
             <a:lvl1pPr>
+              <a:buNone/>
               <a:defRPr sz="1725" b="0">
                 <a:solidFill>
                   <a:srgbClr val="806E60"/>
@@ -14996,6 +15393,7 @@
               </a:defRPr>
             </a:lvl1pPr>
             <a:lvl2pPr>
+              <a:buNone/>
               <a:defRPr sz="1725" b="0">
                 <a:solidFill>
                   <a:srgbClr val="806E60"/>
@@ -15006,6 +15404,7 @@
               </a:defRPr>
             </a:lvl2pPr>
             <a:lvl3pPr>
+              <a:buNone/>
               <a:defRPr sz="1725" b="0">
                 <a:solidFill>
                   <a:srgbClr val="806E60"/>
@@ -15016,6 +15415,7 @@
               </a:defRPr>
             </a:lvl3pPr>
             <a:lvl4pPr>
+              <a:buNone/>
               <a:defRPr sz="1725" b="0">
                 <a:solidFill>
                   <a:srgbClr val="806E60"/>
@@ -15026,6 +15426,7 @@
               </a:defRPr>
             </a:lvl4pPr>
             <a:lvl5pPr>
+              <a:buNone/>
               <a:defRPr sz="1725" b="0">
                 <a:solidFill>
                   <a:srgbClr val="806E60"/>
@@ -15036,6 +15437,7 @@
               </a:defRPr>
             </a:lvl5pPr>
             <a:lvl6pPr>
+              <a:buNone/>
               <a:defRPr sz="1725" b="0">
                 <a:solidFill>
                   <a:srgbClr val="806E60"/>
@@ -15046,6 +15448,7 @@
               </a:defRPr>
             </a:lvl6pPr>
             <a:lvl7pPr>
+              <a:buNone/>
               <a:defRPr sz="1725" b="0">
                 <a:solidFill>
                   <a:srgbClr val="806E60"/>
@@ -15056,6 +15459,7 @@
               </a:defRPr>
             </a:lvl7pPr>
             <a:lvl8pPr>
+              <a:buNone/>
               <a:defRPr sz="1725" b="0">
                 <a:solidFill>
                   <a:srgbClr val="806E60"/>
@@ -15066,6 +15470,7 @@
               </a:defRPr>
             </a:lvl8pPr>
             <a:lvl9pPr>
+              <a:buNone/>
               <a:defRPr sz="1725" b="0">
                 <a:solidFill>
                   <a:srgbClr val="806E60"/>
@@ -15078,6 +15483,7 @@
           </a:lstStyle>
           <a:p xmlns:a="http://schemas.openxmlformats.org/drawingml/2006/main">
             <a:pPr>
+              <a:buNone/>
               <a:defRPr sz="1725" b="0">
                 <a:solidFill>
                   <a:srgbClr val="806E60"/>
@@ -15142,6 +15548,7 @@
               </a:defRPr>
             </a:defPPr>
             <a:lvl1pPr>
+              <a:buNone/>
               <a:defRPr sz="1875" b="0">
                 <a:solidFill>
                   <a:srgbClr val="684A3A"/>
@@ -15152,6 +15559,7 @@
               </a:defRPr>
             </a:lvl1pPr>
             <a:lvl2pPr>
+              <a:buNone/>
               <a:defRPr sz="1875" b="0">
                 <a:solidFill>
                   <a:srgbClr val="684A3A"/>
@@ -15162,6 +15570,7 @@
               </a:defRPr>
             </a:lvl2pPr>
             <a:lvl3pPr>
+              <a:buNone/>
               <a:defRPr sz="1875" b="0">
                 <a:solidFill>
                   <a:srgbClr val="684A3A"/>
@@ -15172,6 +15581,7 @@
               </a:defRPr>
             </a:lvl3pPr>
             <a:lvl4pPr>
+              <a:buNone/>
               <a:defRPr sz="1875" b="0">
                 <a:solidFill>
                   <a:srgbClr val="684A3A"/>
@@ -15182,6 +15592,7 @@
               </a:defRPr>
             </a:lvl4pPr>
             <a:lvl5pPr>
+              <a:buNone/>
               <a:defRPr sz="1875" b="0">
                 <a:solidFill>
                   <a:srgbClr val="684A3A"/>
@@ -15192,6 +15603,7 @@
               </a:defRPr>
             </a:lvl5pPr>
             <a:lvl6pPr>
+              <a:buNone/>
               <a:defRPr sz="1875" b="0">
                 <a:solidFill>
                   <a:srgbClr val="684A3A"/>
@@ -15202,6 +15614,7 @@
               </a:defRPr>
             </a:lvl6pPr>
             <a:lvl7pPr>
+              <a:buNone/>
               <a:defRPr sz="1875" b="0">
                 <a:solidFill>
                   <a:srgbClr val="684A3A"/>
@@ -15212,6 +15625,7 @@
               </a:defRPr>
             </a:lvl7pPr>
             <a:lvl8pPr>
+              <a:buNone/>
               <a:defRPr sz="1875" b="0">
                 <a:solidFill>
                   <a:srgbClr val="684A3A"/>
@@ -15222,6 +15636,7 @@
               </a:defRPr>
             </a:lvl8pPr>
             <a:lvl9pPr>
+              <a:buNone/>
               <a:defRPr sz="1875" b="0">
                 <a:solidFill>
                   <a:srgbClr val="684A3A"/>
@@ -15234,6 +15649,7 @@
           </a:lstStyle>
           <a:p xmlns:a="http://schemas.openxmlformats.org/drawingml/2006/main">
             <a:pPr>
+              <a:buNone/>
               <a:defRPr sz="1875" b="0">
                 <a:solidFill>
                   <a:srgbClr val="684A3A"/>
@@ -15855,6 +16271,7 @@
               </a:defRPr>
             </a:defPPr>
             <a:lvl1pPr>
+              <a:buNone/>
               <a:defRPr sz="2400" b="1">
                 <a:solidFill>
                   <a:srgbClr val="684A3A"/>
@@ -15865,6 +16282,7 @@
               </a:defRPr>
             </a:lvl1pPr>
             <a:lvl2pPr>
+              <a:buNone/>
               <a:defRPr sz="2400" b="1">
                 <a:solidFill>
                   <a:srgbClr val="684A3A"/>
@@ -15875,6 +16293,7 @@
               </a:defRPr>
             </a:lvl2pPr>
             <a:lvl3pPr>
+              <a:buNone/>
               <a:defRPr sz="2400" b="1">
                 <a:solidFill>
                   <a:srgbClr val="684A3A"/>
@@ -15885,6 +16304,7 @@
               </a:defRPr>
             </a:lvl3pPr>
             <a:lvl4pPr>
+              <a:buNone/>
               <a:defRPr sz="2400" b="1">
                 <a:solidFill>
                   <a:srgbClr val="684A3A"/>
@@ -15895,6 +16315,7 @@
               </a:defRPr>
             </a:lvl4pPr>
             <a:lvl5pPr>
+              <a:buNone/>
               <a:defRPr sz="2400" b="1">
                 <a:solidFill>
                   <a:srgbClr val="684A3A"/>
@@ -15905,6 +16326,7 @@
               </a:defRPr>
             </a:lvl5pPr>
             <a:lvl6pPr>
+              <a:buNone/>
               <a:defRPr sz="2400" b="1">
                 <a:solidFill>
                   <a:srgbClr val="684A3A"/>
@@ -15915,6 +16337,7 @@
               </a:defRPr>
             </a:lvl6pPr>
             <a:lvl7pPr>
+              <a:buNone/>
               <a:defRPr sz="2400" b="1">
                 <a:solidFill>
                   <a:srgbClr val="684A3A"/>
@@ -15925,6 +16348,7 @@
               </a:defRPr>
             </a:lvl7pPr>
             <a:lvl8pPr>
+              <a:buNone/>
               <a:defRPr sz="2400" b="1">
                 <a:solidFill>
                   <a:srgbClr val="684A3A"/>
@@ -15935,6 +16359,7 @@
               </a:defRPr>
             </a:lvl8pPr>
             <a:lvl9pPr>
+              <a:buNone/>
               <a:defRPr sz="2400" b="1">
                 <a:solidFill>
                   <a:srgbClr val="684A3A"/>
@@ -15947,6 +16372,7 @@
           </a:lstStyle>
           <a:p xmlns:a="http://schemas.openxmlformats.org/drawingml/2006/main">
             <a:pPr>
+              <a:buNone/>
               <a:defRPr sz="2400" b="1">
                 <a:solidFill>
                   <a:srgbClr val="684A3A"/>
@@ -16041,6 +16467,7 @@
               </a:defRPr>
             </a:defPPr>
             <a:lvl1pPr>
+              <a:buNone/>
               <a:defRPr sz="2100" b="1">
                 <a:solidFill>
                   <a:srgbClr val="684A3A"/>
@@ -16051,6 +16478,7 @@
               </a:defRPr>
             </a:lvl1pPr>
             <a:lvl2pPr>
+              <a:buNone/>
               <a:defRPr sz="2100" b="1">
                 <a:solidFill>
                   <a:srgbClr val="684A3A"/>
@@ -16061,6 +16489,7 @@
               </a:defRPr>
             </a:lvl2pPr>
             <a:lvl3pPr>
+              <a:buNone/>
               <a:defRPr sz="2100" b="1">
                 <a:solidFill>
                   <a:srgbClr val="684A3A"/>
@@ -16071,6 +16500,7 @@
               </a:defRPr>
             </a:lvl3pPr>
             <a:lvl4pPr>
+              <a:buNone/>
               <a:defRPr sz="2100" b="1">
                 <a:solidFill>
                   <a:srgbClr val="684A3A"/>
@@ -16081,6 +16511,7 @@
               </a:defRPr>
             </a:lvl4pPr>
             <a:lvl5pPr>
+              <a:buNone/>
               <a:defRPr sz="2100" b="1">
                 <a:solidFill>
                   <a:srgbClr val="684A3A"/>
@@ -16091,6 +16522,7 @@
               </a:defRPr>
             </a:lvl5pPr>
             <a:lvl6pPr>
+              <a:buNone/>
               <a:defRPr sz="2100" b="1">
                 <a:solidFill>
                   <a:srgbClr val="684A3A"/>
@@ -16101,6 +16533,7 @@
               </a:defRPr>
             </a:lvl6pPr>
             <a:lvl7pPr>
+              <a:buNone/>
               <a:defRPr sz="2100" b="1">
                 <a:solidFill>
                   <a:srgbClr val="684A3A"/>
@@ -16111,6 +16544,7 @@
               </a:defRPr>
             </a:lvl7pPr>
             <a:lvl8pPr>
+              <a:buNone/>
               <a:defRPr sz="2100" b="1">
                 <a:solidFill>
                   <a:srgbClr val="684A3A"/>
@@ -16121,6 +16555,7 @@
               </a:defRPr>
             </a:lvl8pPr>
             <a:lvl9pPr>
+              <a:buNone/>
               <a:defRPr sz="2100" b="1">
                 <a:solidFill>
                   <a:srgbClr val="684A3A"/>
@@ -16133,6 +16568,7 @@
           </a:lstStyle>
           <a:p xmlns:a="http://schemas.openxmlformats.org/drawingml/2006/main">
             <a:pPr>
+              <a:buNone/>
               <a:defRPr sz="2100" b="1">
                 <a:solidFill>
                   <a:srgbClr val="684A3A"/>
@@ -16197,6 +16633,7 @@
               </a:defRPr>
             </a:defPPr>
             <a:lvl1pPr>
+              <a:buNone/>
               <a:defRPr sz="3375" b="1">
                 <a:solidFill>
                   <a:srgbClr val="473229"/>
@@ -16207,6 +16644,7 @@
               </a:defRPr>
             </a:lvl1pPr>
             <a:lvl2pPr>
+              <a:buNone/>
               <a:defRPr sz="3375" b="1">
                 <a:solidFill>
                   <a:srgbClr val="473229"/>
@@ -16217,6 +16655,7 @@
               </a:defRPr>
             </a:lvl2pPr>
             <a:lvl3pPr>
+              <a:buNone/>
               <a:defRPr sz="3375" b="1">
                 <a:solidFill>
                   <a:srgbClr val="473229"/>
@@ -16227,6 +16666,7 @@
               </a:defRPr>
             </a:lvl3pPr>
             <a:lvl4pPr>
+              <a:buNone/>
               <a:defRPr sz="3375" b="1">
                 <a:solidFill>
                   <a:srgbClr val="473229"/>
@@ -16237,6 +16677,7 @@
               </a:defRPr>
             </a:lvl4pPr>
             <a:lvl5pPr>
+              <a:buNone/>
               <a:defRPr sz="3375" b="1">
                 <a:solidFill>
                   <a:srgbClr val="473229"/>
@@ -16247,6 +16688,7 @@
               </a:defRPr>
             </a:lvl5pPr>
             <a:lvl6pPr>
+              <a:buNone/>
               <a:defRPr sz="3375" b="1">
                 <a:solidFill>
                   <a:srgbClr val="473229"/>
@@ -16257,6 +16699,7 @@
               </a:defRPr>
             </a:lvl6pPr>
             <a:lvl7pPr>
+              <a:buNone/>
               <a:defRPr sz="3375" b="1">
                 <a:solidFill>
                   <a:srgbClr val="473229"/>
@@ -16267,6 +16710,7 @@
               </a:defRPr>
             </a:lvl7pPr>
             <a:lvl8pPr>
+              <a:buNone/>
               <a:defRPr sz="3375" b="1">
                 <a:solidFill>
                   <a:srgbClr val="473229"/>
@@ -16277,6 +16721,7 @@
               </a:defRPr>
             </a:lvl8pPr>
             <a:lvl9pPr>
+              <a:buNone/>
               <a:defRPr sz="3375" b="1">
                 <a:solidFill>
                   <a:srgbClr val="473229"/>
@@ -16289,6 +16734,7 @@
           </a:lstStyle>
           <a:p xmlns:a="http://schemas.openxmlformats.org/drawingml/2006/main">
             <a:pPr>
+              <a:buNone/>
               <a:defRPr sz="3375" b="1">
                 <a:solidFill>
                   <a:srgbClr val="473229"/>
@@ -16353,6 +16799,7 @@
               </a:defRPr>
             </a:defPPr>
             <a:lvl1pPr>
+              <a:buNone/>
               <a:defRPr sz="1875" b="0">
                 <a:solidFill>
                   <a:srgbClr val="473229"/>
@@ -16363,6 +16810,7 @@
               </a:defRPr>
             </a:lvl1pPr>
             <a:lvl2pPr>
+              <a:buNone/>
               <a:defRPr sz="1875" b="0">
                 <a:solidFill>
                   <a:srgbClr val="473229"/>
@@ -16373,6 +16821,7 @@
               </a:defRPr>
             </a:lvl2pPr>
             <a:lvl3pPr>
+              <a:buNone/>
               <a:defRPr sz="1875" b="0">
                 <a:solidFill>
                   <a:srgbClr val="473229"/>
@@ -16383,6 +16832,7 @@
               </a:defRPr>
             </a:lvl3pPr>
             <a:lvl4pPr>
+              <a:buNone/>
               <a:defRPr sz="1875" b="0">
                 <a:solidFill>
                   <a:srgbClr val="473229"/>
@@ -16393,6 +16843,7 @@
               </a:defRPr>
             </a:lvl4pPr>
             <a:lvl5pPr>
+              <a:buNone/>
               <a:defRPr sz="1875" b="0">
                 <a:solidFill>
                   <a:srgbClr val="473229"/>
@@ -16403,6 +16854,7 @@
               </a:defRPr>
             </a:lvl5pPr>
             <a:lvl6pPr>
+              <a:buNone/>
               <a:defRPr sz="1875" b="0">
                 <a:solidFill>
                   <a:srgbClr val="473229"/>
@@ -16413,6 +16865,7 @@
               </a:defRPr>
             </a:lvl6pPr>
             <a:lvl7pPr>
+              <a:buNone/>
               <a:defRPr sz="1875" b="0">
                 <a:solidFill>
                   <a:srgbClr val="473229"/>
@@ -16423,6 +16876,7 @@
               </a:defRPr>
             </a:lvl7pPr>
             <a:lvl8pPr>
+              <a:buNone/>
               <a:defRPr sz="1875" b="0">
                 <a:solidFill>
                   <a:srgbClr val="473229"/>
@@ -16433,6 +16887,7 @@
               </a:defRPr>
             </a:lvl8pPr>
             <a:lvl9pPr>
+              <a:buNone/>
               <a:defRPr sz="1875" b="0">
                 <a:solidFill>
                   <a:srgbClr val="473229"/>
@@ -16445,6 +16900,7 @@
           </a:lstStyle>
           <a:p xmlns:a="http://schemas.openxmlformats.org/drawingml/2006/main">
             <a:pPr>
+              <a:buNone/>
               <a:defRPr sz="1875" b="0">
                 <a:solidFill>
                   <a:srgbClr val="473229"/>
@@ -16539,6 +16995,7 @@
               </a:defRPr>
             </a:defPPr>
             <a:lvl1pPr>
+              <a:buNone/>
               <a:defRPr sz="2100" b="1">
                 <a:solidFill>
                   <a:srgbClr val="684A3A"/>
@@ -16549,6 +17006,7 @@
               </a:defRPr>
             </a:lvl1pPr>
             <a:lvl2pPr>
+              <a:buNone/>
               <a:defRPr sz="2100" b="1">
                 <a:solidFill>
                   <a:srgbClr val="684A3A"/>
@@ -16559,6 +17017,7 @@
               </a:defRPr>
             </a:lvl2pPr>
             <a:lvl3pPr>
+              <a:buNone/>
               <a:defRPr sz="2100" b="1">
                 <a:solidFill>
                   <a:srgbClr val="684A3A"/>
@@ -16569,6 +17028,7 @@
               </a:defRPr>
             </a:lvl3pPr>
             <a:lvl4pPr>
+              <a:buNone/>
               <a:defRPr sz="2100" b="1">
                 <a:solidFill>
                   <a:srgbClr val="684A3A"/>
@@ -16579,6 +17039,7 @@
               </a:defRPr>
             </a:lvl4pPr>
             <a:lvl5pPr>
+              <a:buNone/>
               <a:defRPr sz="2100" b="1">
                 <a:solidFill>
                   <a:srgbClr val="684A3A"/>
@@ -16589,6 +17050,7 @@
               </a:defRPr>
             </a:lvl5pPr>
             <a:lvl6pPr>
+              <a:buNone/>
               <a:defRPr sz="2100" b="1">
                 <a:solidFill>
                   <a:srgbClr val="684A3A"/>
@@ -16599,6 +17061,7 @@
               </a:defRPr>
             </a:lvl6pPr>
             <a:lvl7pPr>
+              <a:buNone/>
               <a:defRPr sz="2100" b="1">
                 <a:solidFill>
                   <a:srgbClr val="684A3A"/>
@@ -16609,6 +17072,7 @@
               </a:defRPr>
             </a:lvl7pPr>
             <a:lvl8pPr>
+              <a:buNone/>
               <a:defRPr sz="2100" b="1">
                 <a:solidFill>
                   <a:srgbClr val="684A3A"/>
@@ -16619,6 +17083,7 @@
               </a:defRPr>
             </a:lvl8pPr>
             <a:lvl9pPr>
+              <a:buNone/>
               <a:defRPr sz="2100" b="1">
                 <a:solidFill>
                   <a:srgbClr val="684A3A"/>
@@ -16631,6 +17096,7 @@
           </a:lstStyle>
           <a:p xmlns:a="http://schemas.openxmlformats.org/drawingml/2006/main">
             <a:pPr>
+              <a:buNone/>
               <a:defRPr sz="2100" b="1">
                 <a:solidFill>
                   <a:srgbClr val="684A3A"/>
@@ -16695,6 +17161,7 @@
               </a:defRPr>
             </a:defPPr>
             <a:lvl1pPr>
+              <a:buNone/>
               <a:defRPr sz="3375" b="1">
                 <a:solidFill>
                   <a:srgbClr val="473229"/>
@@ -16705,6 +17172,7 @@
               </a:defRPr>
             </a:lvl1pPr>
             <a:lvl2pPr>
+              <a:buNone/>
               <a:defRPr sz="3375" b="1">
                 <a:solidFill>
                   <a:srgbClr val="473229"/>
@@ -16715,6 +17183,7 @@
               </a:defRPr>
             </a:lvl2pPr>
             <a:lvl3pPr>
+              <a:buNone/>
               <a:defRPr sz="3375" b="1">
                 <a:solidFill>
                   <a:srgbClr val="473229"/>
@@ -16725,6 +17194,7 @@
               </a:defRPr>
             </a:lvl3pPr>
             <a:lvl4pPr>
+              <a:buNone/>
               <a:defRPr sz="3375" b="1">
                 <a:solidFill>
                   <a:srgbClr val="473229"/>
@@ -16735,6 +17205,7 @@
               </a:defRPr>
             </a:lvl4pPr>
             <a:lvl5pPr>
+              <a:buNone/>
               <a:defRPr sz="3375" b="1">
                 <a:solidFill>
                   <a:srgbClr val="473229"/>
@@ -16745,6 +17216,7 @@
               </a:defRPr>
             </a:lvl5pPr>
             <a:lvl6pPr>
+              <a:buNone/>
               <a:defRPr sz="3375" b="1">
                 <a:solidFill>
                   <a:srgbClr val="473229"/>
@@ -16755,6 +17227,7 @@
               </a:defRPr>
             </a:lvl6pPr>
             <a:lvl7pPr>
+              <a:buNone/>
               <a:defRPr sz="3375" b="1">
                 <a:solidFill>
                   <a:srgbClr val="473229"/>
@@ -16765,6 +17238,7 @@
               </a:defRPr>
             </a:lvl7pPr>
             <a:lvl8pPr>
+              <a:buNone/>
               <a:defRPr sz="3375" b="1">
                 <a:solidFill>
                   <a:srgbClr val="473229"/>
@@ -16775,6 +17249,7 @@
               </a:defRPr>
             </a:lvl8pPr>
             <a:lvl9pPr>
+              <a:buNone/>
               <a:defRPr sz="3375" b="1">
                 <a:solidFill>
                   <a:srgbClr val="473229"/>
@@ -16787,6 +17262,7 @@
           </a:lstStyle>
           <a:p xmlns:a="http://schemas.openxmlformats.org/drawingml/2006/main">
             <a:pPr>
+              <a:buNone/>
               <a:defRPr sz="3375" b="1">
                 <a:solidFill>
                   <a:srgbClr val="473229"/>
@@ -16851,6 +17327,7 @@
               </a:defRPr>
             </a:defPPr>
             <a:lvl1pPr>
+              <a:buNone/>
               <a:defRPr sz="1875" b="0">
                 <a:solidFill>
                   <a:srgbClr val="473229"/>
@@ -16861,6 +17338,7 @@
               </a:defRPr>
             </a:lvl1pPr>
             <a:lvl2pPr>
+              <a:buNone/>
               <a:defRPr sz="1875" b="0">
                 <a:solidFill>
                   <a:srgbClr val="473229"/>
@@ -16871,6 +17349,7 @@
               </a:defRPr>
             </a:lvl2pPr>
             <a:lvl3pPr>
+              <a:buNone/>
               <a:defRPr sz="1875" b="0">
                 <a:solidFill>
                   <a:srgbClr val="473229"/>
@@ -16881,6 +17360,7 @@
               </a:defRPr>
             </a:lvl3pPr>
             <a:lvl4pPr>
+              <a:buNone/>
               <a:defRPr sz="1875" b="0">
                 <a:solidFill>
                   <a:srgbClr val="473229"/>
@@ -16891,6 +17371,7 @@
               </a:defRPr>
             </a:lvl4pPr>
             <a:lvl5pPr>
+              <a:buNone/>
               <a:defRPr sz="1875" b="0">
                 <a:solidFill>
                   <a:srgbClr val="473229"/>
@@ -16901,6 +17382,7 @@
               </a:defRPr>
             </a:lvl5pPr>
             <a:lvl6pPr>
+              <a:buNone/>
               <a:defRPr sz="1875" b="0">
                 <a:solidFill>
                   <a:srgbClr val="473229"/>
@@ -16911,6 +17393,7 @@
               </a:defRPr>
             </a:lvl6pPr>
             <a:lvl7pPr>
+              <a:buNone/>
               <a:defRPr sz="1875" b="0">
                 <a:solidFill>
                   <a:srgbClr val="473229"/>
@@ -16921,6 +17404,7 @@
               </a:defRPr>
             </a:lvl7pPr>
             <a:lvl8pPr>
+              <a:buNone/>
               <a:defRPr sz="1875" b="0">
                 <a:solidFill>
                   <a:srgbClr val="473229"/>
@@ -16931,6 +17415,7 @@
               </a:defRPr>
             </a:lvl8pPr>
             <a:lvl9pPr>
+              <a:buNone/>
               <a:defRPr sz="1875" b="0">
                 <a:solidFill>
                   <a:srgbClr val="473229"/>
@@ -16943,6 +17428,7 @@
           </a:lstStyle>
           <a:p xmlns:a="http://schemas.openxmlformats.org/drawingml/2006/main">
             <a:pPr>
+              <a:buNone/>
               <a:defRPr sz="1875" b="0">
                 <a:solidFill>
                   <a:srgbClr val="473229"/>
@@ -17007,6 +17493,7 @@
               </a:defRPr>
             </a:defPPr>
             <a:lvl1pPr>
+              <a:buNone/>
               <a:defRPr sz="1875" b="0">
                 <a:solidFill>
                   <a:srgbClr val="806E60"/>
@@ -17017,6 +17504,7 @@
               </a:defRPr>
             </a:lvl1pPr>
             <a:lvl2pPr>
+              <a:buNone/>
               <a:defRPr sz="1875" b="0">
                 <a:solidFill>
                   <a:srgbClr val="806E60"/>
@@ -17027,6 +17515,7 @@
               </a:defRPr>
             </a:lvl2pPr>
             <a:lvl3pPr>
+              <a:buNone/>
               <a:defRPr sz="1875" b="0">
                 <a:solidFill>
                   <a:srgbClr val="806E60"/>
@@ -17037,6 +17526,7 @@
               </a:defRPr>
             </a:lvl3pPr>
             <a:lvl4pPr>
+              <a:buNone/>
               <a:defRPr sz="1875" b="0">
                 <a:solidFill>
                   <a:srgbClr val="806E60"/>
@@ -17047,6 +17537,7 @@
               </a:defRPr>
             </a:lvl4pPr>
             <a:lvl5pPr>
+              <a:buNone/>
               <a:defRPr sz="1875" b="0">
                 <a:solidFill>
                   <a:srgbClr val="806E60"/>
@@ -17057,6 +17548,7 @@
               </a:defRPr>
             </a:lvl5pPr>
             <a:lvl6pPr>
+              <a:buNone/>
               <a:defRPr sz="1875" b="0">
                 <a:solidFill>
                   <a:srgbClr val="806E60"/>
@@ -17067,6 +17559,7 @@
               </a:defRPr>
             </a:lvl6pPr>
             <a:lvl7pPr>
+              <a:buNone/>
               <a:defRPr sz="1875" b="0">
                 <a:solidFill>
                   <a:srgbClr val="806E60"/>
@@ -17077,6 +17570,7 @@
               </a:defRPr>
             </a:lvl7pPr>
             <a:lvl8pPr>
+              <a:buNone/>
               <a:defRPr sz="1875" b="0">
                 <a:solidFill>
                   <a:srgbClr val="806E60"/>
@@ -17087,6 +17581,7 @@
               </a:defRPr>
             </a:lvl8pPr>
             <a:lvl9pPr>
+              <a:buNone/>
               <a:defRPr sz="1875" b="0">
                 <a:solidFill>
                   <a:srgbClr val="806E60"/>
@@ -17099,6 +17594,7 @@
           </a:lstStyle>
           <a:p xmlns:a="http://schemas.openxmlformats.org/drawingml/2006/main">
             <a:pPr>
+              <a:buNone/>
               <a:defRPr sz="1875" b="0">
                 <a:solidFill>
                   <a:srgbClr val="806E60"/>
@@ -17720,6 +18216,7 @@
               </a:defRPr>
             </a:defPPr>
             <a:lvl1pPr>
+              <a:buNone/>
               <a:defRPr sz="5850" b="1">
                 <a:solidFill>
                   <a:srgbClr val="684A3A"/>
@@ -17730,6 +18227,7 @@
               </a:defRPr>
             </a:lvl1pPr>
             <a:lvl2pPr>
+              <a:buNone/>
               <a:defRPr sz="5850" b="1">
                 <a:solidFill>
                   <a:srgbClr val="684A3A"/>
@@ -17740,6 +18238,7 @@
               </a:defRPr>
             </a:lvl2pPr>
             <a:lvl3pPr>
+              <a:buNone/>
               <a:defRPr sz="5850" b="1">
                 <a:solidFill>
                   <a:srgbClr val="684A3A"/>
@@ -17750,6 +18249,7 @@
               </a:defRPr>
             </a:lvl3pPr>
             <a:lvl4pPr>
+              <a:buNone/>
               <a:defRPr sz="5850" b="1">
                 <a:solidFill>
                   <a:srgbClr val="684A3A"/>
@@ -17760,6 +18260,7 @@
               </a:defRPr>
             </a:lvl4pPr>
             <a:lvl5pPr>
+              <a:buNone/>
               <a:defRPr sz="5850" b="1">
                 <a:solidFill>
                   <a:srgbClr val="684A3A"/>
@@ -17770,6 +18271,7 @@
               </a:defRPr>
             </a:lvl5pPr>
             <a:lvl6pPr>
+              <a:buNone/>
               <a:defRPr sz="5850" b="1">
                 <a:solidFill>
                   <a:srgbClr val="684A3A"/>
@@ -17780,6 +18282,7 @@
               </a:defRPr>
             </a:lvl6pPr>
             <a:lvl7pPr>
+              <a:buNone/>
               <a:defRPr sz="5850" b="1">
                 <a:solidFill>
                   <a:srgbClr val="684A3A"/>
@@ -17790,6 +18293,7 @@
               </a:defRPr>
             </a:lvl7pPr>
             <a:lvl8pPr>
+              <a:buNone/>
               <a:defRPr sz="5850" b="1">
                 <a:solidFill>
                   <a:srgbClr val="684A3A"/>
@@ -17800,6 +18304,7 @@
               </a:defRPr>
             </a:lvl8pPr>
             <a:lvl9pPr>
+              <a:buNone/>
               <a:defRPr sz="5850" b="1">
                 <a:solidFill>
                   <a:srgbClr val="684A3A"/>
@@ -17812,6 +18317,7 @@
           </a:lstStyle>
           <a:p xmlns:a="http://schemas.openxmlformats.org/drawingml/2006/main">
             <a:pPr>
+              <a:buNone/>
               <a:defRPr sz="5850" b="1">
                 <a:solidFill>
                   <a:srgbClr val="684A3A"/>
@@ -17876,6 +18382,7 @@
               </a:defRPr>
             </a:defPPr>
             <a:lvl1pPr>
+              <a:buNone/>
               <a:defRPr sz="2025" b="0">
                 <a:solidFill>
                   <a:srgbClr val="473229"/>
@@ -17886,6 +18393,7 @@
               </a:defRPr>
             </a:lvl1pPr>
             <a:lvl2pPr>
+              <a:buNone/>
               <a:defRPr sz="2025" b="0">
                 <a:solidFill>
                   <a:srgbClr val="473229"/>
@@ -17896,6 +18404,7 @@
               </a:defRPr>
             </a:lvl2pPr>
             <a:lvl3pPr>
+              <a:buNone/>
               <a:defRPr sz="2025" b="0">
                 <a:solidFill>
                   <a:srgbClr val="473229"/>
@@ -17906,6 +18415,7 @@
               </a:defRPr>
             </a:lvl3pPr>
             <a:lvl4pPr>
+              <a:buNone/>
               <a:defRPr sz="2025" b="0">
                 <a:solidFill>
                   <a:srgbClr val="473229"/>
@@ -17916,6 +18426,7 @@
               </a:defRPr>
             </a:lvl4pPr>
             <a:lvl5pPr>
+              <a:buNone/>
               <a:defRPr sz="2025" b="0">
                 <a:solidFill>
                   <a:srgbClr val="473229"/>
@@ -17926,6 +18437,7 @@
               </a:defRPr>
             </a:lvl5pPr>
             <a:lvl6pPr>
+              <a:buNone/>
               <a:defRPr sz="2025" b="0">
                 <a:solidFill>
                   <a:srgbClr val="473229"/>
@@ -17936,6 +18448,7 @@
               </a:defRPr>
             </a:lvl6pPr>
             <a:lvl7pPr>
+              <a:buNone/>
               <a:defRPr sz="2025" b="0">
                 <a:solidFill>
                   <a:srgbClr val="473229"/>
@@ -17946,6 +18459,7 @@
               </a:defRPr>
             </a:lvl7pPr>
             <a:lvl8pPr>
+              <a:buNone/>
               <a:defRPr sz="2025" b="0">
                 <a:solidFill>
                   <a:srgbClr val="473229"/>
@@ -17956,6 +18470,7 @@
               </a:defRPr>
             </a:lvl8pPr>
             <a:lvl9pPr>
+              <a:buNone/>
               <a:defRPr sz="2025" b="0">
                 <a:solidFill>
                   <a:srgbClr val="473229"/>
@@ -17968,6 +18483,7 @@
           </a:lstStyle>
           <a:p xmlns:a="http://schemas.openxmlformats.org/drawingml/2006/main">
             <a:pPr>
+              <a:buNone/>
               <a:defRPr sz="2025" b="0">
                 <a:solidFill>
                   <a:srgbClr val="473229"/>
@@ -18032,6 +18548,7 @@
               </a:defRPr>
             </a:defPPr>
             <a:lvl1pPr>
+              <a:buNone/>
               <a:defRPr sz="5850" b="1">
                 <a:solidFill>
                   <a:srgbClr val="684A3A"/>
@@ -18042,6 +18559,7 @@
               </a:defRPr>
             </a:lvl1pPr>
             <a:lvl2pPr>
+              <a:buNone/>
               <a:defRPr sz="5850" b="1">
                 <a:solidFill>
                   <a:srgbClr val="684A3A"/>
@@ -18052,6 +18570,7 @@
               </a:defRPr>
             </a:lvl2pPr>
             <a:lvl3pPr>
+              <a:buNone/>
               <a:defRPr sz="5850" b="1">
                 <a:solidFill>
                   <a:srgbClr val="684A3A"/>
@@ -18062,6 +18581,7 @@
               </a:defRPr>
             </a:lvl3pPr>
             <a:lvl4pPr>
+              <a:buNone/>
               <a:defRPr sz="5850" b="1">
                 <a:solidFill>
                   <a:srgbClr val="684A3A"/>
@@ -18072,6 +18592,7 @@
               </a:defRPr>
             </a:lvl4pPr>
             <a:lvl5pPr>
+              <a:buNone/>
               <a:defRPr sz="5850" b="1">
                 <a:solidFill>
                   <a:srgbClr val="684A3A"/>
@@ -18082,6 +18603,7 @@
               </a:defRPr>
             </a:lvl5pPr>
             <a:lvl6pPr>
+              <a:buNone/>
               <a:defRPr sz="5850" b="1">
                 <a:solidFill>
                   <a:srgbClr val="684A3A"/>
@@ -18092,6 +18614,7 @@
               </a:defRPr>
             </a:lvl6pPr>
             <a:lvl7pPr>
+              <a:buNone/>
               <a:defRPr sz="5850" b="1">
                 <a:solidFill>
                   <a:srgbClr val="684A3A"/>
@@ -18102,6 +18625,7 @@
               </a:defRPr>
             </a:lvl7pPr>
             <a:lvl8pPr>
+              <a:buNone/>
               <a:defRPr sz="5850" b="1">
                 <a:solidFill>
                   <a:srgbClr val="684A3A"/>
@@ -18112,6 +18636,7 @@
               </a:defRPr>
             </a:lvl8pPr>
             <a:lvl9pPr>
+              <a:buNone/>
               <a:defRPr sz="5850" b="1">
                 <a:solidFill>
                   <a:srgbClr val="684A3A"/>
@@ -18124,6 +18649,7 @@
           </a:lstStyle>
           <a:p xmlns:a="http://schemas.openxmlformats.org/drawingml/2006/main">
             <a:pPr>
+              <a:buNone/>
               <a:defRPr sz="5850" b="1">
                 <a:solidFill>
                   <a:srgbClr val="684A3A"/>
@@ -18188,6 +18714,7 @@
               </a:defRPr>
             </a:defPPr>
             <a:lvl1pPr>
+              <a:buNone/>
               <a:defRPr sz="2025" b="0">
                 <a:solidFill>
                   <a:srgbClr val="473229"/>
@@ -18198,6 +18725,7 @@
               </a:defRPr>
             </a:lvl1pPr>
             <a:lvl2pPr>
+              <a:buNone/>
               <a:defRPr sz="2025" b="0">
                 <a:solidFill>
                   <a:srgbClr val="473229"/>
@@ -18208,6 +18736,7 @@
               </a:defRPr>
             </a:lvl2pPr>
             <a:lvl3pPr>
+              <a:buNone/>
               <a:defRPr sz="2025" b="0">
                 <a:solidFill>
                   <a:srgbClr val="473229"/>
@@ -18218,6 +18747,7 @@
               </a:defRPr>
             </a:lvl3pPr>
             <a:lvl4pPr>
+              <a:buNone/>
               <a:defRPr sz="2025" b="0">
                 <a:solidFill>
                   <a:srgbClr val="473229"/>
@@ -18228,6 +18758,7 @@
               </a:defRPr>
             </a:lvl4pPr>
             <a:lvl5pPr>
+              <a:buNone/>
               <a:defRPr sz="2025" b="0">
                 <a:solidFill>
                   <a:srgbClr val="473229"/>
@@ -18238,6 +18769,7 @@
               </a:defRPr>
             </a:lvl5pPr>
             <a:lvl6pPr>
+              <a:buNone/>
               <a:defRPr sz="2025" b="0">
                 <a:solidFill>
                   <a:srgbClr val="473229"/>
@@ -18248,6 +18780,7 @@
               </a:defRPr>
             </a:lvl6pPr>
             <a:lvl7pPr>
+              <a:buNone/>
               <a:defRPr sz="2025" b="0">
                 <a:solidFill>
                   <a:srgbClr val="473229"/>
@@ -18258,6 +18791,7 @@
               </a:defRPr>
             </a:lvl7pPr>
             <a:lvl8pPr>
+              <a:buNone/>
               <a:defRPr sz="2025" b="0">
                 <a:solidFill>
                   <a:srgbClr val="473229"/>
@@ -18268,6 +18802,7 @@
               </a:defRPr>
             </a:lvl8pPr>
             <a:lvl9pPr>
+              <a:buNone/>
               <a:defRPr sz="2025" b="0">
                 <a:solidFill>
                   <a:srgbClr val="473229"/>
@@ -18280,6 +18815,7 @@
           </a:lstStyle>
           <a:p xmlns:a="http://schemas.openxmlformats.org/drawingml/2006/main">
             <a:pPr>
+              <a:buNone/>
               <a:defRPr sz="2025" b="0">
                 <a:solidFill>
                   <a:srgbClr val="473229"/>
@@ -18344,6 +18880,7 @@
               </a:defRPr>
             </a:defPPr>
             <a:lvl1pPr>
+              <a:buNone/>
               <a:defRPr sz="5850" b="1">
                 <a:solidFill>
                   <a:srgbClr val="684A3A"/>
@@ -18354,6 +18891,7 @@
               </a:defRPr>
             </a:lvl1pPr>
             <a:lvl2pPr>
+              <a:buNone/>
               <a:defRPr sz="5850" b="1">
                 <a:solidFill>
                   <a:srgbClr val="684A3A"/>
@@ -18364,6 +18902,7 @@
               </a:defRPr>
             </a:lvl2pPr>
             <a:lvl3pPr>
+              <a:buNone/>
               <a:defRPr sz="5850" b="1">
                 <a:solidFill>
                   <a:srgbClr val="684A3A"/>
@@ -18374,6 +18913,7 @@
               </a:defRPr>
             </a:lvl3pPr>
             <a:lvl4pPr>
+              <a:buNone/>
               <a:defRPr sz="5850" b="1">
                 <a:solidFill>
                   <a:srgbClr val="684A3A"/>
@@ -18384,6 +18924,7 @@
               </a:defRPr>
             </a:lvl4pPr>
             <a:lvl5pPr>
+              <a:buNone/>
               <a:defRPr sz="5850" b="1">
                 <a:solidFill>
                   <a:srgbClr val="684A3A"/>
@@ -18394,6 +18935,7 @@
               </a:defRPr>
             </a:lvl5pPr>
             <a:lvl6pPr>
+              <a:buNone/>
               <a:defRPr sz="5850" b="1">
                 <a:solidFill>
                   <a:srgbClr val="684A3A"/>
@@ -18404,6 +18946,7 @@
               </a:defRPr>
             </a:lvl6pPr>
             <a:lvl7pPr>
+              <a:buNone/>
               <a:defRPr sz="5850" b="1">
                 <a:solidFill>
                   <a:srgbClr val="684A3A"/>
@@ -18414,6 +18957,7 @@
               </a:defRPr>
             </a:lvl7pPr>
             <a:lvl8pPr>
+              <a:buNone/>
               <a:defRPr sz="5850" b="1">
                 <a:solidFill>
                   <a:srgbClr val="684A3A"/>
@@ -18424,6 +18968,7 @@
               </a:defRPr>
             </a:lvl8pPr>
             <a:lvl9pPr>
+              <a:buNone/>
               <a:defRPr sz="5850" b="1">
                 <a:solidFill>
                   <a:srgbClr val="684A3A"/>
@@ -18436,6 +18981,7 @@
           </a:lstStyle>
           <a:p xmlns:a="http://schemas.openxmlformats.org/drawingml/2006/main">
             <a:pPr>
+              <a:buNone/>
               <a:defRPr sz="5850" b="1">
                 <a:solidFill>
                   <a:srgbClr val="684A3A"/>
@@ -18500,6 +19046,7 @@
               </a:defRPr>
             </a:defPPr>
             <a:lvl1pPr>
+              <a:buNone/>
               <a:defRPr sz="2025" b="0">
                 <a:solidFill>
                   <a:srgbClr val="473229"/>
@@ -18510,6 +19057,7 @@
               </a:defRPr>
             </a:lvl1pPr>
             <a:lvl2pPr>
+              <a:buNone/>
               <a:defRPr sz="2025" b="0">
                 <a:solidFill>
                   <a:srgbClr val="473229"/>
@@ -18520,6 +19068,7 @@
               </a:defRPr>
             </a:lvl2pPr>
             <a:lvl3pPr>
+              <a:buNone/>
               <a:defRPr sz="2025" b="0">
                 <a:solidFill>
                   <a:srgbClr val="473229"/>
@@ -18530,6 +19079,7 @@
               </a:defRPr>
             </a:lvl3pPr>
             <a:lvl4pPr>
+              <a:buNone/>
               <a:defRPr sz="2025" b="0">
                 <a:solidFill>
                   <a:srgbClr val="473229"/>
@@ -18540,6 +19090,7 @@
               </a:defRPr>
             </a:lvl4pPr>
             <a:lvl5pPr>
+              <a:buNone/>
               <a:defRPr sz="2025" b="0">
                 <a:solidFill>
                   <a:srgbClr val="473229"/>
@@ -18550,6 +19101,7 @@
               </a:defRPr>
             </a:lvl5pPr>
             <a:lvl6pPr>
+              <a:buNone/>
               <a:defRPr sz="2025" b="0">
                 <a:solidFill>
                   <a:srgbClr val="473229"/>
@@ -18560,6 +19112,7 @@
               </a:defRPr>
             </a:lvl6pPr>
             <a:lvl7pPr>
+              <a:buNone/>
               <a:defRPr sz="2025" b="0">
                 <a:solidFill>
                   <a:srgbClr val="473229"/>
@@ -18570,6 +19123,7 @@
               </a:defRPr>
             </a:lvl7pPr>
             <a:lvl8pPr>
+              <a:buNone/>
               <a:defRPr sz="2025" b="0">
                 <a:solidFill>
                   <a:srgbClr val="473229"/>
@@ -18580,6 +19134,7 @@
               </a:defRPr>
             </a:lvl8pPr>
             <a:lvl9pPr>
+              <a:buNone/>
               <a:defRPr sz="2025" b="0">
                 <a:solidFill>
                   <a:srgbClr val="473229"/>
@@ -18592,6 +19147,7 @@
           </a:lstStyle>
           <a:p xmlns:a="http://schemas.openxmlformats.org/drawingml/2006/main">
             <a:pPr>
+              <a:buNone/>
               <a:defRPr sz="2025" b="0">
                 <a:solidFill>
                   <a:srgbClr val="473229"/>
@@ -18686,6 +19242,7 @@
               </a:defRPr>
             </a:defPPr>
             <a:lvl1pPr>
+              <a:buNone/>
               <a:defRPr sz="2175" b="1">
                 <a:solidFill>
                   <a:srgbClr val="684A3A"/>
@@ -18696,6 +19253,7 @@
               </a:defRPr>
             </a:lvl1pPr>
             <a:lvl2pPr>
+              <a:buNone/>
               <a:defRPr sz="2175" b="1">
                 <a:solidFill>
                   <a:srgbClr val="684A3A"/>
@@ -18706,6 +19264,7 @@
               </a:defRPr>
             </a:lvl2pPr>
             <a:lvl3pPr>
+              <a:buNone/>
               <a:defRPr sz="2175" b="1">
                 <a:solidFill>
                   <a:srgbClr val="684A3A"/>
@@ -18716,6 +19275,7 @@
               </a:defRPr>
             </a:lvl3pPr>
             <a:lvl4pPr>
+              <a:buNone/>
               <a:defRPr sz="2175" b="1">
                 <a:solidFill>
                   <a:srgbClr val="684A3A"/>
@@ -18726,6 +19286,7 @@
               </a:defRPr>
             </a:lvl4pPr>
             <a:lvl5pPr>
+              <a:buNone/>
               <a:defRPr sz="2175" b="1">
                 <a:solidFill>
                   <a:srgbClr val="684A3A"/>
@@ -18736,6 +19297,7 @@
               </a:defRPr>
             </a:lvl5pPr>
             <a:lvl6pPr>
+              <a:buNone/>
               <a:defRPr sz="2175" b="1">
                 <a:solidFill>
                   <a:srgbClr val="684A3A"/>
@@ -18746,6 +19308,7 @@
               </a:defRPr>
             </a:lvl6pPr>
             <a:lvl7pPr>
+              <a:buNone/>
               <a:defRPr sz="2175" b="1">
                 <a:solidFill>
                   <a:srgbClr val="684A3A"/>
@@ -18756,6 +19319,7 @@
               </a:defRPr>
             </a:lvl7pPr>
             <a:lvl8pPr>
+              <a:buNone/>
               <a:defRPr sz="2175" b="1">
                 <a:solidFill>
                   <a:srgbClr val="684A3A"/>
@@ -18766,6 +19330,7 @@
               </a:defRPr>
             </a:lvl8pPr>
             <a:lvl9pPr>
+              <a:buNone/>
               <a:defRPr sz="2175" b="1">
                 <a:solidFill>
                   <a:srgbClr val="684A3A"/>
@@ -18778,6 +19343,7 @@
           </a:lstStyle>
           <a:p xmlns:a="http://schemas.openxmlformats.org/drawingml/2006/main">
             <a:pPr>
+              <a:buNone/>
               <a:defRPr sz="2175" b="1">
                 <a:solidFill>
                   <a:srgbClr val="684A3A"/>
@@ -18796,7 +19362,7 @@
                 <a:ea typeface="Segoe UI"/>
                 <a:cs typeface="Segoe UI"/>
               </a:rPr>
-              <a:t>36 application tests   ·   13 official H-MEM checks</a:t>
+              <a:t>50 application tests and 13 official H-MEM checks</a:t>
             </a:r>
           </a:p>
         </p:txBody>
@@ -18842,6 +19408,7 @@
               </a:defRPr>
             </a:defPPr>
             <a:lvl1pPr>
+              <a:buNone/>
               <a:defRPr sz="1875" b="0">
                 <a:solidFill>
                   <a:srgbClr val="473229"/>
@@ -18852,6 +19419,7 @@
               </a:defRPr>
             </a:lvl1pPr>
             <a:lvl2pPr>
+              <a:buNone/>
               <a:defRPr sz="1875" b="0">
                 <a:solidFill>
                   <a:srgbClr val="473229"/>
@@ -18862,6 +19430,7 @@
               </a:defRPr>
             </a:lvl2pPr>
             <a:lvl3pPr>
+              <a:buNone/>
               <a:defRPr sz="1875" b="0">
                 <a:solidFill>
                   <a:srgbClr val="473229"/>
@@ -18872,6 +19441,7 @@
               </a:defRPr>
             </a:lvl3pPr>
             <a:lvl4pPr>
+              <a:buNone/>
               <a:defRPr sz="1875" b="0">
                 <a:solidFill>
                   <a:srgbClr val="473229"/>
@@ -18882,6 +19452,7 @@
               </a:defRPr>
             </a:lvl4pPr>
             <a:lvl5pPr>
+              <a:buNone/>
               <a:defRPr sz="1875" b="0">
                 <a:solidFill>
                   <a:srgbClr val="473229"/>
@@ -18892,6 +19463,7 @@
               </a:defRPr>
             </a:lvl5pPr>
             <a:lvl6pPr>
+              <a:buNone/>
               <a:defRPr sz="1875" b="0">
                 <a:solidFill>
                   <a:srgbClr val="473229"/>
@@ -18902,6 +19474,7 @@
               </a:defRPr>
             </a:lvl6pPr>
             <a:lvl7pPr>
+              <a:buNone/>
               <a:defRPr sz="1875" b="0">
                 <a:solidFill>
                   <a:srgbClr val="473229"/>
@@ -18912,6 +19485,7 @@
               </a:defRPr>
             </a:lvl7pPr>
             <a:lvl8pPr>
+              <a:buNone/>
               <a:defRPr sz="1875" b="0">
                 <a:solidFill>
                   <a:srgbClr val="473229"/>
@@ -18922,6 +19496,7 @@
               </a:defRPr>
             </a:lvl8pPr>
             <a:lvl9pPr>
+              <a:buNone/>
               <a:defRPr sz="1875" b="0">
                 <a:solidFill>
                   <a:srgbClr val="473229"/>
@@ -18934,6 +19509,7 @@
           </a:lstStyle>
           <a:p xmlns:a="http://schemas.openxmlformats.org/drawingml/2006/main">
             <a:pPr>
+              <a:buNone/>
               <a:defRPr sz="1875" b="0">
                 <a:solidFill>
                   <a:srgbClr val="473229"/>
@@ -18998,6 +19574,7 @@
               </a:defRPr>
             </a:defPPr>
             <a:lvl1pPr>
+              <a:buNone/>
               <a:defRPr sz="1650" b="0">
                 <a:solidFill>
                   <a:srgbClr val="806E60"/>
@@ -19008,6 +19585,7 @@
               </a:defRPr>
             </a:lvl1pPr>
             <a:lvl2pPr>
+              <a:buNone/>
               <a:defRPr sz="1650" b="0">
                 <a:solidFill>
                   <a:srgbClr val="806E60"/>
@@ -19018,6 +19596,7 @@
               </a:defRPr>
             </a:lvl2pPr>
             <a:lvl3pPr>
+              <a:buNone/>
               <a:defRPr sz="1650" b="0">
                 <a:solidFill>
                   <a:srgbClr val="806E60"/>
@@ -19028,6 +19607,7 @@
               </a:defRPr>
             </a:lvl3pPr>
             <a:lvl4pPr>
+              <a:buNone/>
               <a:defRPr sz="1650" b="0">
                 <a:solidFill>
                   <a:srgbClr val="806E60"/>
@@ -19038,6 +19618,7 @@
               </a:defRPr>
             </a:lvl4pPr>
             <a:lvl5pPr>
+              <a:buNone/>
               <a:defRPr sz="1650" b="0">
                 <a:solidFill>
                   <a:srgbClr val="806E60"/>
@@ -19048,6 +19629,7 @@
               </a:defRPr>
             </a:lvl5pPr>
             <a:lvl6pPr>
+              <a:buNone/>
               <a:defRPr sz="1650" b="0">
                 <a:solidFill>
                   <a:srgbClr val="806E60"/>
@@ -19058,6 +19640,7 @@
               </a:defRPr>
             </a:lvl6pPr>
             <a:lvl7pPr>
+              <a:buNone/>
               <a:defRPr sz="1650" b="0">
                 <a:solidFill>
                   <a:srgbClr val="806E60"/>
@@ -19068,6 +19651,7 @@
               </a:defRPr>
             </a:lvl7pPr>
             <a:lvl8pPr>
+              <a:buNone/>
               <a:defRPr sz="1650" b="0">
                 <a:solidFill>
                   <a:srgbClr val="806E60"/>
@@ -19078,6 +19662,7 @@
               </a:defRPr>
             </a:lvl8pPr>
             <a:lvl9pPr>
+              <a:buNone/>
               <a:defRPr sz="1650" b="0">
                 <a:solidFill>
                   <a:srgbClr val="806E60"/>
@@ -19090,6 +19675,7 @@
           </a:lstStyle>
           <a:p xmlns:a="http://schemas.openxmlformats.org/drawingml/2006/main">
             <a:pPr>
+              <a:buNone/>
               <a:defRPr sz="1650" b="0">
                 <a:solidFill>
                   <a:srgbClr val="806E60"/>
@@ -19711,6 +20297,7 @@
               </a:defRPr>
             </a:defPPr>
             <a:lvl1pPr>
+              <a:buNone/>
               <a:defRPr sz="2400" b="1">
                 <a:solidFill>
                   <a:srgbClr val="684A3A"/>
@@ -19721,6 +20308,7 @@
               </a:defRPr>
             </a:lvl1pPr>
             <a:lvl2pPr>
+              <a:buNone/>
               <a:defRPr sz="2400" b="1">
                 <a:solidFill>
                   <a:srgbClr val="684A3A"/>
@@ -19731,6 +20319,7 @@
               </a:defRPr>
             </a:lvl2pPr>
             <a:lvl3pPr>
+              <a:buNone/>
               <a:defRPr sz="2400" b="1">
                 <a:solidFill>
                   <a:srgbClr val="684A3A"/>
@@ -19741,6 +20330,7 @@
               </a:defRPr>
             </a:lvl3pPr>
             <a:lvl4pPr>
+              <a:buNone/>
               <a:defRPr sz="2400" b="1">
                 <a:solidFill>
                   <a:srgbClr val="684A3A"/>
@@ -19751,6 +20341,7 @@
               </a:defRPr>
             </a:lvl4pPr>
             <a:lvl5pPr>
+              <a:buNone/>
               <a:defRPr sz="2400" b="1">
                 <a:solidFill>
                   <a:srgbClr val="684A3A"/>
@@ -19761,6 +20352,7 @@
               </a:defRPr>
             </a:lvl5pPr>
             <a:lvl6pPr>
+              <a:buNone/>
               <a:defRPr sz="2400" b="1">
                 <a:solidFill>
                   <a:srgbClr val="684A3A"/>
@@ -19771,6 +20363,7 @@
               </a:defRPr>
             </a:lvl6pPr>
             <a:lvl7pPr>
+              <a:buNone/>
               <a:defRPr sz="2400" b="1">
                 <a:solidFill>
                   <a:srgbClr val="684A3A"/>
@@ -19781,6 +20374,7 @@
               </a:defRPr>
             </a:lvl7pPr>
             <a:lvl8pPr>
+              <a:buNone/>
               <a:defRPr sz="2400" b="1">
                 <a:solidFill>
                   <a:srgbClr val="684A3A"/>
@@ -19791,6 +20385,7 @@
               </a:defRPr>
             </a:lvl8pPr>
             <a:lvl9pPr>
+              <a:buNone/>
               <a:defRPr sz="2400" b="1">
                 <a:solidFill>
                   <a:srgbClr val="684A3A"/>
@@ -19803,6 +20398,7 @@
           </a:lstStyle>
           <a:p xmlns:a="http://schemas.openxmlformats.org/drawingml/2006/main">
             <a:pPr>
+              <a:buNone/>
               <a:defRPr sz="2400" b="1">
                 <a:solidFill>
                   <a:srgbClr val="684A3A"/>
@@ -19867,6 +20463,7 @@
               </a:defRPr>
             </a:defPPr>
             <a:lvl1pPr>
+              <a:buNone/>
               <a:defRPr sz="2025" b="0">
                 <a:solidFill>
                   <a:srgbClr val="473229"/>
@@ -19877,6 +20474,7 @@
               </a:defRPr>
             </a:lvl1pPr>
             <a:lvl2pPr>
+              <a:buNone/>
               <a:defRPr sz="2025" b="0">
                 <a:solidFill>
                   <a:srgbClr val="473229"/>
@@ -19887,6 +20485,7 @@
               </a:defRPr>
             </a:lvl2pPr>
             <a:lvl3pPr>
+              <a:buNone/>
               <a:defRPr sz="2025" b="0">
                 <a:solidFill>
                   <a:srgbClr val="473229"/>
@@ -19897,6 +20496,7 @@
               </a:defRPr>
             </a:lvl3pPr>
             <a:lvl4pPr>
+              <a:buNone/>
               <a:defRPr sz="2025" b="0">
                 <a:solidFill>
                   <a:srgbClr val="473229"/>
@@ -19907,6 +20507,7 @@
               </a:defRPr>
             </a:lvl4pPr>
             <a:lvl5pPr>
+              <a:buNone/>
               <a:defRPr sz="2025" b="0">
                 <a:solidFill>
                   <a:srgbClr val="473229"/>
@@ -19917,6 +20518,7 @@
               </a:defRPr>
             </a:lvl5pPr>
             <a:lvl6pPr>
+              <a:buNone/>
               <a:defRPr sz="2025" b="0">
                 <a:solidFill>
                   <a:srgbClr val="473229"/>
@@ -19927,6 +20529,7 @@
               </a:defRPr>
             </a:lvl6pPr>
             <a:lvl7pPr>
+              <a:buNone/>
               <a:defRPr sz="2025" b="0">
                 <a:solidFill>
                   <a:srgbClr val="473229"/>
@@ -19937,6 +20540,7 @@
               </a:defRPr>
             </a:lvl7pPr>
             <a:lvl8pPr>
+              <a:buNone/>
               <a:defRPr sz="2025" b="0">
                 <a:solidFill>
                   <a:srgbClr val="473229"/>
@@ -19947,6 +20551,7 @@
               </a:defRPr>
             </a:lvl8pPr>
             <a:lvl9pPr>
+              <a:buNone/>
               <a:defRPr sz="2025" b="0">
                 <a:solidFill>
                   <a:srgbClr val="473229"/>
@@ -19959,6 +20564,7 @@
           </a:lstStyle>
           <a:p xmlns:a="http://schemas.openxmlformats.org/drawingml/2006/main">
             <a:pPr>
+              <a:buNone/>
               <a:defRPr sz="2025" b="0">
                 <a:solidFill>
                   <a:srgbClr val="473229"/>
@@ -19987,6 +20593,7 @@
           </a:p>
           <a:p xmlns:a="http://schemas.openxmlformats.org/drawingml/2006/main">
             <a:pPr>
+              <a:buNone/>
               <a:defRPr sz="2025" b="0">
                 <a:solidFill>
                   <a:srgbClr val="473229"/>
@@ -20015,6 +20622,7 @@
           </a:p>
           <a:p xmlns:a="http://schemas.openxmlformats.org/drawingml/2006/main">
             <a:pPr>
+              <a:buNone/>
               <a:defRPr sz="2025" b="0">
                 <a:solidFill>
                   <a:srgbClr val="473229"/>
@@ -20043,6 +20651,7 @@
           </a:p>
           <a:p xmlns:a="http://schemas.openxmlformats.org/drawingml/2006/main">
             <a:pPr>
+              <a:buNone/>
               <a:defRPr sz="2025" b="0">
                 <a:solidFill>
                   <a:srgbClr val="473229"/>
@@ -20137,6 +20746,7 @@
               </a:defRPr>
             </a:defPPr>
             <a:lvl1pPr>
+              <a:buNone/>
               <a:defRPr sz="2400" b="1">
                 <a:solidFill>
                   <a:srgbClr val="684A3A"/>
@@ -20147,6 +20757,7 @@
               </a:defRPr>
             </a:lvl1pPr>
             <a:lvl2pPr>
+              <a:buNone/>
               <a:defRPr sz="2400" b="1">
                 <a:solidFill>
                   <a:srgbClr val="684A3A"/>
@@ -20157,6 +20768,7 @@
               </a:defRPr>
             </a:lvl2pPr>
             <a:lvl3pPr>
+              <a:buNone/>
               <a:defRPr sz="2400" b="1">
                 <a:solidFill>
                   <a:srgbClr val="684A3A"/>
@@ -20167,6 +20779,7 @@
               </a:defRPr>
             </a:lvl3pPr>
             <a:lvl4pPr>
+              <a:buNone/>
               <a:defRPr sz="2400" b="1">
                 <a:solidFill>
                   <a:srgbClr val="684A3A"/>
@@ -20177,6 +20790,7 @@
               </a:defRPr>
             </a:lvl4pPr>
             <a:lvl5pPr>
+              <a:buNone/>
               <a:defRPr sz="2400" b="1">
                 <a:solidFill>
                   <a:srgbClr val="684A3A"/>
@@ -20187,6 +20801,7 @@
               </a:defRPr>
             </a:lvl5pPr>
             <a:lvl6pPr>
+              <a:buNone/>
               <a:defRPr sz="2400" b="1">
                 <a:solidFill>
                   <a:srgbClr val="684A3A"/>
@@ -20197,6 +20812,7 @@
               </a:defRPr>
             </a:lvl6pPr>
             <a:lvl7pPr>
+              <a:buNone/>
               <a:defRPr sz="2400" b="1">
                 <a:solidFill>
                   <a:srgbClr val="684A3A"/>
@@ -20207,6 +20823,7 @@
               </a:defRPr>
             </a:lvl7pPr>
             <a:lvl8pPr>
+              <a:buNone/>
               <a:defRPr sz="2400" b="1">
                 <a:solidFill>
                   <a:srgbClr val="684A3A"/>
@@ -20217,6 +20834,7 @@
               </a:defRPr>
             </a:lvl8pPr>
             <a:lvl9pPr>
+              <a:buNone/>
               <a:defRPr sz="2400" b="1">
                 <a:solidFill>
                   <a:srgbClr val="684A3A"/>
@@ -20229,6 +20847,7 @@
           </a:lstStyle>
           <a:p xmlns:a="http://schemas.openxmlformats.org/drawingml/2006/main">
             <a:pPr>
+              <a:buNone/>
               <a:defRPr sz="2400" b="1">
                 <a:solidFill>
                   <a:srgbClr val="684A3A"/>
@@ -20293,6 +20912,7 @@
               </a:defRPr>
             </a:defPPr>
             <a:lvl1pPr>
+              <a:buNone/>
               <a:defRPr sz="2025" b="0">
                 <a:solidFill>
                   <a:srgbClr val="473229"/>
@@ -20303,6 +20923,7 @@
               </a:defRPr>
             </a:lvl1pPr>
             <a:lvl2pPr>
+              <a:buNone/>
               <a:defRPr sz="2025" b="0">
                 <a:solidFill>
                   <a:srgbClr val="473229"/>
@@ -20313,6 +20934,7 @@
               </a:defRPr>
             </a:lvl2pPr>
             <a:lvl3pPr>
+              <a:buNone/>
               <a:defRPr sz="2025" b="0">
                 <a:solidFill>
                   <a:srgbClr val="473229"/>
@@ -20323,6 +20945,7 @@
               </a:defRPr>
             </a:lvl3pPr>
             <a:lvl4pPr>
+              <a:buNone/>
               <a:defRPr sz="2025" b="0">
                 <a:solidFill>
                   <a:srgbClr val="473229"/>
@@ -20333,6 +20956,7 @@
               </a:defRPr>
             </a:lvl4pPr>
             <a:lvl5pPr>
+              <a:buNone/>
               <a:defRPr sz="2025" b="0">
                 <a:solidFill>
                   <a:srgbClr val="473229"/>
@@ -20343,6 +20967,7 @@
               </a:defRPr>
             </a:lvl5pPr>
             <a:lvl6pPr>
+              <a:buNone/>
               <a:defRPr sz="2025" b="0">
                 <a:solidFill>
                   <a:srgbClr val="473229"/>
@@ -20353,6 +20978,7 @@
               </a:defRPr>
             </a:lvl6pPr>
             <a:lvl7pPr>
+              <a:buNone/>
               <a:defRPr sz="2025" b="0">
                 <a:solidFill>
                   <a:srgbClr val="473229"/>
@@ -20363,6 +20989,7 @@
               </a:defRPr>
             </a:lvl7pPr>
             <a:lvl8pPr>
+              <a:buNone/>
               <a:defRPr sz="2025" b="0">
                 <a:solidFill>
                   <a:srgbClr val="473229"/>
@@ -20373,6 +21000,7 @@
               </a:defRPr>
             </a:lvl8pPr>
             <a:lvl9pPr>
+              <a:buNone/>
               <a:defRPr sz="2025" b="0">
                 <a:solidFill>
                   <a:srgbClr val="473229"/>
@@ -20385,6 +21013,7 @@
           </a:lstStyle>
           <a:p xmlns:a="http://schemas.openxmlformats.org/drawingml/2006/main">
             <a:pPr>
+              <a:buNone/>
               <a:defRPr sz="2025" b="0">
                 <a:solidFill>
                   <a:srgbClr val="473229"/>
@@ -20413,6 +21042,7 @@
           </a:p>
           <a:p xmlns:a="http://schemas.openxmlformats.org/drawingml/2006/main">
             <a:pPr>
+              <a:buNone/>
               <a:defRPr sz="2025" b="0">
                 <a:solidFill>
                   <a:srgbClr val="473229"/>
@@ -20441,6 +21071,7 @@
           </a:p>
           <a:p xmlns:a="http://schemas.openxmlformats.org/drawingml/2006/main">
             <a:pPr>
+              <a:buNone/>
               <a:defRPr sz="2025" b="0">
                 <a:solidFill>
                   <a:srgbClr val="473229"/>
@@ -20469,6 +21100,7 @@
           </a:p>
           <a:p xmlns:a="http://schemas.openxmlformats.org/drawingml/2006/main">
             <a:pPr>
+              <a:buNone/>
               <a:defRPr sz="2025" b="0">
                 <a:solidFill>
                   <a:srgbClr val="473229"/>

--- a/submission/TalentLens-Deck.pptx
+++ b/submission/TalentLens-Deck.pptx
@@ -2,22 +2,22 @@
 <file path=ppt/presentation.xml><?xml version="1.0" encoding="utf-8"?>
 <p:presentation xmlns:p="http://schemas.openxmlformats.org/presentationml/2006/main">
   <p:sldMasterIdLst>
-    <p:sldMasterId xmlns:r="http://schemas.openxmlformats.org/officeDocument/2006/relationships" id="2147483648" r:id="R9ca01544cd5b4967"/>
+    <p:sldMasterId xmlns:r="http://schemas.openxmlformats.org/officeDocument/2006/relationships" id="2147483648" r:id="R748b838f81064a3b"/>
   </p:sldMasterIdLst>
   <p:notesMasterIdLst>
-    <p:notesMasterId xmlns:r="http://schemas.openxmlformats.org/officeDocument/2006/relationships" r:id="Re81621a971d84917"/>
+    <p:notesMasterId xmlns:r="http://schemas.openxmlformats.org/officeDocument/2006/relationships" r:id="R8ab0de4494334e81"/>
   </p:notesMasterIdLst>
   <p:sldIdLst>
-    <p:sldId xmlns:r="http://schemas.openxmlformats.org/officeDocument/2006/relationships" id="256" r:id="R081480e004ec426c"/>
-    <p:sldId xmlns:r="http://schemas.openxmlformats.org/officeDocument/2006/relationships" id="257" r:id="R8cf8fc34cad04915"/>
-    <p:sldId xmlns:r="http://schemas.openxmlformats.org/officeDocument/2006/relationships" id="258" r:id="Raff3488e92e84ba7"/>
-    <p:sldId xmlns:r="http://schemas.openxmlformats.org/officeDocument/2006/relationships" id="259" r:id="Re9b415d5e7dc41d6"/>
-    <p:sldId xmlns:r="http://schemas.openxmlformats.org/officeDocument/2006/relationships" id="260" r:id="Ra8149bc28ea34ad7"/>
-    <p:sldId xmlns:r="http://schemas.openxmlformats.org/officeDocument/2006/relationships" id="261" r:id="R3a3b9328503341a3"/>
-    <p:sldId xmlns:r="http://schemas.openxmlformats.org/officeDocument/2006/relationships" id="262" r:id="R002b7acdeffc43b7"/>
-    <p:sldId xmlns:r="http://schemas.openxmlformats.org/officeDocument/2006/relationships" id="263" r:id="R98736b8a4d2c4519"/>
-    <p:sldId xmlns:r="http://schemas.openxmlformats.org/officeDocument/2006/relationships" id="264" r:id="R544df8d7beb74eea"/>
-    <p:sldId xmlns:r="http://schemas.openxmlformats.org/officeDocument/2006/relationships" id="265" r:id="Rc73846b66ab24cda"/>
+    <p:sldId xmlns:r="http://schemas.openxmlformats.org/officeDocument/2006/relationships" id="256" r:id="Rd422e4eaf89c4efb"/>
+    <p:sldId xmlns:r="http://schemas.openxmlformats.org/officeDocument/2006/relationships" id="257" r:id="Rc702dfa1319e4e6d"/>
+    <p:sldId xmlns:r="http://schemas.openxmlformats.org/officeDocument/2006/relationships" id="258" r:id="R6e349f2b44c742cc"/>
+    <p:sldId xmlns:r="http://schemas.openxmlformats.org/officeDocument/2006/relationships" id="259" r:id="Rd3adbcefef1b490d"/>
+    <p:sldId xmlns:r="http://schemas.openxmlformats.org/officeDocument/2006/relationships" id="260" r:id="Rcdbe52b59b3f4dac"/>
+    <p:sldId xmlns:r="http://schemas.openxmlformats.org/officeDocument/2006/relationships" id="261" r:id="Re64d1399deb64e88"/>
+    <p:sldId xmlns:r="http://schemas.openxmlformats.org/officeDocument/2006/relationships" id="262" r:id="Rc653fd19a9004892"/>
+    <p:sldId xmlns:r="http://schemas.openxmlformats.org/officeDocument/2006/relationships" id="263" r:id="Rd950456bc33a4dcc"/>
+    <p:sldId xmlns:r="http://schemas.openxmlformats.org/officeDocument/2006/relationships" id="264" r:id="R5a534ccb722c47a5"/>
+    <p:sldId xmlns:r="http://schemas.openxmlformats.org/officeDocument/2006/relationships" id="265" r:id="R15efc53b2a134b03"/>
   </p:sldIdLst>
   <p:sldSz cx="12192000" cy="6858000"/>
   <p:notesSz cx="6858000" cy="9144000"/>
@@ -801,7 +801,7 @@
           <a:lstStyle xmlns:a="http://schemas.openxmlformats.org/drawingml/2006/main"/>
           <a:p xmlns:a="http://schemas.openxmlformats.org/drawingml/2006/main">
             <a:r>
-              <a:t>Sources: docs/SUBMISSION.md, examples/zetaris/verified-review-workflow.json. Model: nvidia/nemotron-3.5-lightning-30b-a3b. Official H-MEM conformance: 13/13 checks at pinned revision 1742dec56a66e58eef9dda2d2b865823758ca8cd. Cursor is optional and no Cursor-built award is claimed. The 27 October reinforcement queries before each Zetaris analysis and records provenance in the report and Markdown export. Query/request IDs are generated by TalentLens and sent to Zetaris for correlation, not independently signed receipts. Tests cover empty/failed reads, source replacement, deletion during query and local-mode independence. The 26 October recording predates this enhancement and is retained as historical evidence. Sources: docs/ZETARIS-WORKFLOW.md, tests/zetaris.test.js.</a:t>
+              <a:t>Sources: docs/SUBMISSION.md, examples/zetaris/verified-review-workflow.json. Model: nvidia/nemotron-3.5-lightning-30b-a3b. Official H-MEM conformance: 13/13 checks at pinned revision 1742dec56a66e58eef9dda2d2b865823758ca8cd. Cursor is optional and no Cursor-built award is claimed. The 27 October reinforcement queries before each Zetaris analysis and records provenance in the report and Markdown export. Query/request IDs are generated by TalentLens and sent to Zetaris for correlation, not independently signed receipts. Tests cover empty/failed reads, source replacement, deletion during query and local-mode independence. The 26 October recording predates this enhancement and is retained as historical evidence. Sources: docs/ZETARIS-WORKFLOW.md, tests/zetaris.test.js. Real fresh-query verification passed 27 October 2026 at 07:35 UTC: sourceMode zetaris, three fictional CVs, two requirements, three actual nvidia/nemotron-3.5-lightning-30b-a3b calls through Nightshift. Every call retained its receipt. The report preserves SQL, UTC timing, client query/request IDs and exact CV document versions/SHA-256. IDs are correlation identifiers, not independently signed receipts. Evidence: examples/zetaris/verified-fresh-query.json. Reproduce: npm run verify:zetaris. Docker recovered after preserving two stale socket directories; no images, containers or volumes were deleted. Recovery: docs/DOCKER-WINDOWS-RECOVERY.md. This single run is not a general accuracy or availability claim.</a:t>
             </a:r>
           </a:p>
         </p:txBody>
@@ -3524,12 +3524,12 @@
   </p:cSld>
   <p:clrMap bg1="lt1" tx1="dk1" bg2="lt2" tx2="dk2" accent1="accent1" accent2="accent2" accent3="accent3" accent4="accent4" accent5="accent5" accent6="accent6" hlink="hlink" folHlink="folHlink"/>
   <p:sldLayoutIdLst>
-    <p:sldLayoutId xmlns:r="http://schemas.openxmlformats.org/officeDocument/2006/relationships" id="2147483649" r:id="Re94a072cf4104e95"/>
-    <p:sldLayoutId xmlns:r="http://schemas.openxmlformats.org/officeDocument/2006/relationships" id="2147483650" r:id="R09f35050d34a4fcc"/>
-    <p:sldLayoutId xmlns:r="http://schemas.openxmlformats.org/officeDocument/2006/relationships" id="2147483651" r:id="R6f9507c624a8470f"/>
-    <p:sldLayoutId xmlns:r="http://schemas.openxmlformats.org/officeDocument/2006/relationships" id="2147483652" r:id="R2851993d0f764e7a"/>
-    <p:sldLayoutId xmlns:r="http://schemas.openxmlformats.org/officeDocument/2006/relationships" id="2147483653" r:id="Rd42367ca8e4d4fb5"/>
-    <p:sldLayoutId xmlns:r="http://schemas.openxmlformats.org/officeDocument/2006/relationships" id="2147483654" r:id="R46f04ddeb152405a"/>
+    <p:sldLayoutId xmlns:r="http://schemas.openxmlformats.org/officeDocument/2006/relationships" id="2147483649" r:id="R8fb3869bc3154e7b"/>
+    <p:sldLayoutId xmlns:r="http://schemas.openxmlformats.org/officeDocument/2006/relationships" id="2147483650" r:id="R67d8b0bd2e36473c"/>
+    <p:sldLayoutId xmlns:r="http://schemas.openxmlformats.org/officeDocument/2006/relationships" id="2147483651" r:id="R53231f3ed8c94a83"/>
+    <p:sldLayoutId xmlns:r="http://schemas.openxmlformats.org/officeDocument/2006/relationships" id="2147483652" r:id="R9af2942becf04b65"/>
+    <p:sldLayoutId xmlns:r="http://schemas.openxmlformats.org/officeDocument/2006/relationships" id="2147483653" r:id="Rad3b50a1b2ce40d6"/>
+    <p:sldLayoutId xmlns:r="http://schemas.openxmlformats.org/officeDocument/2006/relationships" id="2147483654" r:id="R5f80f73858334a61"/>
   </p:sldLayoutIdLst>
   <p:txStyles>
     <p:titleStyle>
@@ -4080,7 +4080,7 @@
           <p:cNvPr id="7" name="">
             <a:extLst xmlns:a="http://schemas.openxmlformats.org/drawingml/2006/main">
               <a:ext uri="{FF2B5EF4-FFF2-40B4-BE49-F238E27FC236}">
-                <a16:creationId xmlns:a16="http://schemas.microsoft.com/office/drawing/2014/main" id="{3AC2577B-C5CD-4F9E-883D-C77781C86430}"/>
+                <a16:creationId xmlns:a16="http://schemas.microsoft.com/office/drawing/2014/main" id="{2197BFB2-3A32-45BE-9B6B-A0C1F81295B8}"/>
               </a:ext>
             </a:extLst>
           </p:cNvPr>
@@ -4090,10 +4090,10 @@
           <p:nvPr/>
         </p:nvPicPr>
         <p:blipFill>
-          <a:blip xmlns:r="http://schemas.openxmlformats.org/officeDocument/2006/relationships" xmlns:a="http://schemas.openxmlformats.org/drawingml/2006/main" r:embed="R043c5350be534083">
+          <a:blip xmlns:r="http://schemas.openxmlformats.org/officeDocument/2006/relationships" xmlns:a="http://schemas.openxmlformats.org/drawingml/2006/main" r:embed="R6e25eed5e59946af">
             <a:extLst>
               <a:ext uri="{96DAC541-7B7A-43D3-8B79-37D633B846F1}">
-                <asvg:svgBlip xmlns:asvg="http://schemas.microsoft.com/office/drawing/2016/SVG/main" r:embed="R94bcab64d6fe4810"/>
+                <asvg:svgBlip xmlns:asvg="http://schemas.microsoft.com/office/drawing/2016/SVG/main" r:embed="Rbcf7385dd7aa40e4"/>
               </a:ext>
             </a:extLst>
           </a:blip>
@@ -8691,7 +8691,7 @@
           <p:cNvPr id="8" name="">
             <a:extLst xmlns:a="http://schemas.openxmlformats.org/drawingml/2006/main">
               <a:ext uri="{FF2B5EF4-FFF2-40B4-BE49-F238E27FC236}">
-                <a16:creationId xmlns:a16="http://schemas.microsoft.com/office/drawing/2014/main" id="{56912F0F-4042-4D94-B68B-F13B9AEDC46D}"/>
+                <a16:creationId xmlns:a16="http://schemas.microsoft.com/office/drawing/2014/main" id="{020F70D0-AA7C-499C-A106-C0B9D0FE32E2}"/>
               </a:ext>
             </a:extLst>
           </p:cNvPr>
@@ -8701,7 +8701,7 @@
           <p:nvPr/>
         </p:nvPicPr>
         <p:blipFill>
-          <a:blip xmlns:r="http://schemas.openxmlformats.org/officeDocument/2006/relationships" xmlns:a="http://schemas.openxmlformats.org/drawingml/2006/main" r:embed="R5873538696cf46d3"/>
+          <a:blip xmlns:r="http://schemas.openxmlformats.org/officeDocument/2006/relationships" xmlns:a="http://schemas.openxmlformats.org/drawingml/2006/main" r:embed="Re8eebc929d4a4c4e"/>
           <a:stretch xmlns:a="http://schemas.openxmlformats.org/drawingml/2006/main"/>
         </p:blipFill>
         <p:spPr>
@@ -8914,7 +8914,7 @@
           <p:cNvPr id="43" name="">
             <a:extLst xmlns:a="http://schemas.openxmlformats.org/drawingml/2006/main">
               <a:ext uri="{FF2B5EF4-FFF2-40B4-BE49-F238E27FC236}">
-                <a16:creationId xmlns:a16="http://schemas.microsoft.com/office/drawing/2014/main" id="{D101EEF9-55CA-4B7C-A615-562D286832EC}"/>
+                <a16:creationId xmlns:a16="http://schemas.microsoft.com/office/drawing/2014/main" id="{30F2E62B-5E6A-4DD4-8A74-8353F663D2C5}"/>
               </a:ext>
             </a:extLst>
           </p:cNvPr>
@@ -8945,7 +8945,7 @@
           <p:cNvPr id="42" name="">
             <a:extLst xmlns:a="http://schemas.openxmlformats.org/drawingml/2006/main">
               <a:ext uri="{FF2B5EF4-FFF2-40B4-BE49-F238E27FC236}">
-                <a16:creationId xmlns:a16="http://schemas.microsoft.com/office/drawing/2014/main" id="{82FA5692-EDA4-4F16-AD19-FAA9D2ED11F9}"/>
+                <a16:creationId xmlns:a16="http://schemas.microsoft.com/office/drawing/2014/main" id="{6BCBD678-9983-4ADE-A529-C5F6A5CD355F}"/>
               </a:ext>
             </a:extLst>
           </p:cNvPr>
@@ -8980,7 +8980,7 @@
           <p:cNvPr id="39" name="">
             <a:extLst xmlns:a="http://schemas.openxmlformats.org/drawingml/2006/main">
               <a:ext uri="{FF2B5EF4-FFF2-40B4-BE49-F238E27FC236}">
-                <a16:creationId xmlns:a16="http://schemas.microsoft.com/office/drawing/2014/main" id="{AFE82E24-01B2-4C21-A6BD-93B7CC9EE89A}"/>
+                <a16:creationId xmlns:a16="http://schemas.microsoft.com/office/drawing/2014/main" id="{BF421F64-A9E4-4380-9915-5EB3A308DA7F}"/>
               </a:ext>
             </a:extLst>
           </p:cNvPr>
@@ -9011,7 +9011,7 @@
           <p:cNvPr id="38" name="">
             <a:extLst xmlns:a="http://schemas.openxmlformats.org/drawingml/2006/main">
               <a:ext uri="{FF2B5EF4-FFF2-40B4-BE49-F238E27FC236}">
-                <a16:creationId xmlns:a16="http://schemas.microsoft.com/office/drawing/2014/main" id="{DF2BF020-477F-4709-95F7-3EBF28441727}"/>
+                <a16:creationId xmlns:a16="http://schemas.microsoft.com/office/drawing/2014/main" id="{4EFAD026-CD36-4C5D-A87D-AA7AF4E517C9}"/>
               </a:ext>
             </a:extLst>
           </p:cNvPr>
@@ -9042,7 +9042,7 @@
           <p:cNvPr id="37" name="">
             <a:extLst xmlns:a="http://schemas.openxmlformats.org/drawingml/2006/main">
               <a:ext uri="{FF2B5EF4-FFF2-40B4-BE49-F238E27FC236}">
-                <a16:creationId xmlns:a16="http://schemas.microsoft.com/office/drawing/2014/main" id="{AF246F15-34CB-4EC1-8382-547A2434A3F1}"/>
+                <a16:creationId xmlns:a16="http://schemas.microsoft.com/office/drawing/2014/main" id="{64E3C409-C54E-4FDD-B0CA-9AF4D6891E2A}"/>
               </a:ext>
             </a:extLst>
           </p:cNvPr>
@@ -9073,7 +9073,7 @@
           <p:cNvPr id="36" name="">
             <a:extLst xmlns:a="http://schemas.openxmlformats.org/drawingml/2006/main">
               <a:ext uri="{FF2B5EF4-FFF2-40B4-BE49-F238E27FC236}">
-                <a16:creationId xmlns:a16="http://schemas.microsoft.com/office/drawing/2014/main" id="{6BFB0627-F524-4608-AB9B-310D3E6BAEE7}"/>
+                <a16:creationId xmlns:a16="http://schemas.microsoft.com/office/drawing/2014/main" id="{E7C96836-0ADE-42D0-930F-D20DD1F9E0E3}"/>
               </a:ext>
             </a:extLst>
           </p:cNvPr>
@@ -12803,7 +12803,7 @@
                 <a:ea typeface="Segoe UI"/>
                 <a:cs typeface="Segoe UI"/>
               </a:rPr>
-              <a:t>Joins profile and CV sources. Fresh SELECT before analysis, with a visible query and document trace.</a:t>
+              <a:t>Joined profile/CV view. Three-CV live run verified with a fresh query and exact document traces.</a:t>
             </a:r>
           </a:p>
         </p:txBody>
